--- a/assets/cph705/cancer-surveillance-Presentation-asynchronous-session.pptx
+++ b/assets/cph705/cancer-surveillance-Presentation-asynchronous-session.pptx
@@ -5,7 +5,7 @@
     <p:sldMasterId id="2147483659" r:id="rId1"/>
   </p:sldMasterIdLst>
   <p:notesMasterIdLst>
-    <p:notesMasterId r:id="rId19"/>
+    <p:notesMasterId r:id="rId16"/>
   </p:notesMasterIdLst>
   <p:sldIdLst>
     <p:sldId id="256" r:id="rId2"/>
@@ -14,27 +14,24 @@
     <p:sldId id="261" r:id="rId5"/>
     <p:sldId id="262" r:id="rId6"/>
     <p:sldId id="263" r:id="rId7"/>
-    <p:sldId id="264" r:id="rId8"/>
-    <p:sldId id="265" r:id="rId9"/>
-    <p:sldId id="266" r:id="rId10"/>
-    <p:sldId id="267" r:id="rId11"/>
-    <p:sldId id="268" r:id="rId12"/>
-    <p:sldId id="269" r:id="rId13"/>
-    <p:sldId id="270" r:id="rId14"/>
-    <p:sldId id="272" r:id="rId15"/>
-    <p:sldId id="273" r:id="rId16"/>
-    <p:sldId id="274" r:id="rId17"/>
-    <p:sldId id="275" r:id="rId18"/>
+    <p:sldId id="266" r:id="rId8"/>
+    <p:sldId id="267" r:id="rId9"/>
+    <p:sldId id="268" r:id="rId10"/>
+    <p:sldId id="276" r:id="rId11"/>
+    <p:sldId id="269" r:id="rId12"/>
+    <p:sldId id="272" r:id="rId13"/>
+    <p:sldId id="273" r:id="rId14"/>
+    <p:sldId id="275" r:id="rId15"/>
   </p:sldIdLst>
   <p:sldSz cx="12192000" cy="6858000"/>
   <p:notesSz cx="6858000" cy="9144000"/>
   <p:embeddedFontLst>
     <p:embeddedFont>
       <p:font typeface="DM Sans" pitchFamily="2" charset="77"/>
-      <p:regular r:id="rId20"/>
-      <p:bold r:id="rId21"/>
-      <p:italic r:id="rId22"/>
-      <p:boldItalic r:id="rId23"/>
+      <p:regular r:id="rId17"/>
+      <p:bold r:id="rId18"/>
+      <p:italic r:id="rId19"/>
+      <p:boldItalic r:id="rId20"/>
     </p:embeddedFont>
   </p:embeddedFontLst>
   <p:defaultTextStyle>
@@ -777,7 +774,7 @@
               </a:spcAft>
               <a:buNone/>
             </a:pPr>
-            <a:endParaRPr/>
+            <a:endParaRPr dirty="0"/>
           </a:p>
         </p:txBody>
       </p:sp>
@@ -831,214 +828,6 @@
 </file>
 
 <file path=ppt/notesSlides/notesSlide10.xml><?xml version="1.0" encoding="utf-8"?>
-<p:notes xmlns:a="http://schemas.openxmlformats.org/drawingml/2006/main" xmlns:r="http://schemas.openxmlformats.org/officeDocument/2006/relationships" xmlns:p="http://schemas.openxmlformats.org/presentationml/2006/main" showMasterSp="0" showMasterPhAnim="0">
-  <p:cSld>
-    <p:spTree>
-      <p:nvGrpSpPr>
-        <p:cNvPr id="1" name="Shape 253"/>
-        <p:cNvGrpSpPr/>
-        <p:nvPr/>
-      </p:nvGrpSpPr>
-      <p:grpSpPr>
-        <a:xfrm>
-          <a:off x="0" y="0"/>
-          <a:ext cx="0" cy="0"/>
-          <a:chOff x="0" y="0"/>
-          <a:chExt cx="0" cy="0"/>
-        </a:xfrm>
-      </p:grpSpPr>
-      <p:sp>
-        <p:nvSpPr>
-          <p:cNvPr id="254" name="Google Shape;254;p12:notes"/>
-          <p:cNvSpPr txBox="1">
-            <a:spLocks noGrp="1"/>
-          </p:cNvSpPr>
-          <p:nvPr>
-            <p:ph type="body" idx="1"/>
-          </p:nvPr>
-        </p:nvSpPr>
-        <p:spPr>
-          <a:xfrm>
-            <a:off x="685800" y="4343400"/>
-            <a:ext cx="5486400" cy="4114800"/>
-          </a:xfrm>
-          <a:prstGeom prst="rect">
-            <a:avLst/>
-          </a:prstGeom>
-        </p:spPr>
-        <p:txBody>
-          <a:bodyPr spcFirstLastPara="1" wrap="square" lIns="91425" tIns="91425" rIns="91425" bIns="91425" anchor="t" anchorCtr="0">
-            <a:noAutofit/>
-          </a:bodyPr>
-          <a:lstStyle/>
-          <a:p>
-            <a:pPr marL="0" lvl="0" indent="0" algn="l" rtl="0">
-              <a:spcBef>
-                <a:spcPts val="0"/>
-              </a:spcBef>
-              <a:spcAft>
-                <a:spcPts val="0"/>
-              </a:spcAft>
-              <a:buNone/>
-            </a:pPr>
-            <a:endParaRPr/>
-          </a:p>
-        </p:txBody>
-      </p:sp>
-      <p:sp>
-        <p:nvSpPr>
-          <p:cNvPr id="255" name="Google Shape;255;p12:notes"/>
-          <p:cNvSpPr>
-            <a:spLocks noGrp="1" noRot="1" noChangeAspect="1"/>
-          </p:cNvSpPr>
-          <p:nvPr>
-            <p:ph type="sldImg" idx="2"/>
-          </p:nvPr>
-        </p:nvSpPr>
-        <p:spPr>
-          <a:xfrm>
-            <a:off x="381000" y="685800"/>
-            <a:ext cx="6096000" cy="3429000"/>
-          </a:xfrm>
-          <a:custGeom>
-            <a:avLst/>
-            <a:gdLst/>
-            <a:ahLst/>
-            <a:cxnLst/>
-            <a:rect l="l" t="t" r="r" b="b"/>
-            <a:pathLst>
-              <a:path w="120000" h="120000" extrusionOk="0">
-                <a:moveTo>
-                  <a:pt x="0" y="0"/>
-                </a:moveTo>
-                <a:lnTo>
-                  <a:pt x="120000" y="0"/>
-                </a:lnTo>
-                <a:lnTo>
-                  <a:pt x="120000" y="120000"/>
-                </a:lnTo>
-                <a:lnTo>
-                  <a:pt x="0" y="120000"/>
-                </a:lnTo>
-                <a:close/>
-              </a:path>
-            </a:pathLst>
-          </a:custGeom>
-        </p:spPr>
-      </p:sp>
-    </p:spTree>
-  </p:cSld>
-  <p:clrMapOvr>
-    <a:masterClrMapping/>
-  </p:clrMapOvr>
-</p:notes>
-</file>
-
-<file path=ppt/notesSlides/notesSlide11.xml><?xml version="1.0" encoding="utf-8"?>
-<p:notes xmlns:a="http://schemas.openxmlformats.org/drawingml/2006/main" xmlns:r="http://schemas.openxmlformats.org/officeDocument/2006/relationships" xmlns:p="http://schemas.openxmlformats.org/presentationml/2006/main" showMasterSp="0" showMasterPhAnim="0">
-  <p:cSld>
-    <p:spTree>
-      <p:nvGrpSpPr>
-        <p:cNvPr id="1" name="Shape 272"/>
-        <p:cNvGrpSpPr/>
-        <p:nvPr/>
-      </p:nvGrpSpPr>
-      <p:grpSpPr>
-        <a:xfrm>
-          <a:off x="0" y="0"/>
-          <a:ext cx="0" cy="0"/>
-          <a:chOff x="0" y="0"/>
-          <a:chExt cx="0" cy="0"/>
-        </a:xfrm>
-      </p:grpSpPr>
-      <p:sp>
-        <p:nvSpPr>
-          <p:cNvPr id="273" name="Google Shape;273;p13:notes"/>
-          <p:cNvSpPr txBox="1">
-            <a:spLocks noGrp="1"/>
-          </p:cNvSpPr>
-          <p:nvPr>
-            <p:ph type="body" idx="1"/>
-          </p:nvPr>
-        </p:nvSpPr>
-        <p:spPr>
-          <a:xfrm>
-            <a:off x="685800" y="4343400"/>
-            <a:ext cx="5486400" cy="4114800"/>
-          </a:xfrm>
-          <a:prstGeom prst="rect">
-            <a:avLst/>
-          </a:prstGeom>
-        </p:spPr>
-        <p:txBody>
-          <a:bodyPr spcFirstLastPara="1" wrap="square" lIns="91425" tIns="91425" rIns="91425" bIns="91425" anchor="t" anchorCtr="0">
-            <a:noAutofit/>
-          </a:bodyPr>
-          <a:lstStyle/>
-          <a:p>
-            <a:pPr marL="0" lvl="0" indent="0" algn="l" rtl="0">
-              <a:spcBef>
-                <a:spcPts val="0"/>
-              </a:spcBef>
-              <a:spcAft>
-                <a:spcPts val="0"/>
-              </a:spcAft>
-              <a:buNone/>
-            </a:pPr>
-            <a:endParaRPr/>
-          </a:p>
-        </p:txBody>
-      </p:sp>
-      <p:sp>
-        <p:nvSpPr>
-          <p:cNvPr id="274" name="Google Shape;274;p13:notes"/>
-          <p:cNvSpPr>
-            <a:spLocks noGrp="1" noRot="1" noChangeAspect="1"/>
-          </p:cNvSpPr>
-          <p:nvPr>
-            <p:ph type="sldImg" idx="2"/>
-          </p:nvPr>
-        </p:nvSpPr>
-        <p:spPr>
-          <a:xfrm>
-            <a:off x="381000" y="685800"/>
-            <a:ext cx="6096000" cy="3429000"/>
-          </a:xfrm>
-          <a:custGeom>
-            <a:avLst/>
-            <a:gdLst/>
-            <a:ahLst/>
-            <a:cxnLst/>
-            <a:rect l="l" t="t" r="r" b="b"/>
-            <a:pathLst>
-              <a:path w="120000" h="120000" extrusionOk="0">
-                <a:moveTo>
-                  <a:pt x="0" y="0"/>
-                </a:moveTo>
-                <a:lnTo>
-                  <a:pt x="120000" y="0"/>
-                </a:lnTo>
-                <a:lnTo>
-                  <a:pt x="120000" y="120000"/>
-                </a:lnTo>
-                <a:lnTo>
-                  <a:pt x="0" y="120000"/>
-                </a:lnTo>
-                <a:close/>
-              </a:path>
-            </a:pathLst>
-          </a:custGeom>
-        </p:spPr>
-      </p:sp>
-    </p:spTree>
-  </p:cSld>
-  <p:clrMapOvr>
-    <a:masterClrMapping/>
-  </p:clrMapOvr>
-</p:notes>
-</file>
-
-<file path=ppt/notesSlides/notesSlide12.xml><?xml version="1.0" encoding="utf-8"?>
 <p:notes xmlns:a="http://schemas.openxmlformats.org/drawingml/2006/main" xmlns:r="http://schemas.openxmlformats.org/officeDocument/2006/relationships" xmlns:p="http://schemas.openxmlformats.org/presentationml/2006/main" showMasterSp="0" showMasterPhAnim="0">
   <p:cSld>
     <p:spTree>
@@ -1142,111 +931,7 @@
 </p:notes>
 </file>
 
-<file path=ppt/notesSlides/notesSlide13.xml><?xml version="1.0" encoding="utf-8"?>
-<p:notes xmlns:a="http://schemas.openxmlformats.org/drawingml/2006/main" xmlns:r="http://schemas.openxmlformats.org/officeDocument/2006/relationships" xmlns:p="http://schemas.openxmlformats.org/presentationml/2006/main" showMasterSp="0" showMasterPhAnim="0">
-  <p:cSld>
-    <p:spTree>
-      <p:nvGrpSpPr>
-        <p:cNvPr id="1" name="Shape 306"/>
-        <p:cNvGrpSpPr/>
-        <p:nvPr/>
-      </p:nvGrpSpPr>
-      <p:grpSpPr>
-        <a:xfrm>
-          <a:off x="0" y="0"/>
-          <a:ext cx="0" cy="0"/>
-          <a:chOff x="0" y="0"/>
-          <a:chExt cx="0" cy="0"/>
-        </a:xfrm>
-      </p:grpSpPr>
-      <p:sp>
-        <p:nvSpPr>
-          <p:cNvPr id="307" name="Google Shape;307;p15:notes"/>
-          <p:cNvSpPr txBox="1">
-            <a:spLocks noGrp="1"/>
-          </p:cNvSpPr>
-          <p:nvPr>
-            <p:ph type="body" idx="1"/>
-          </p:nvPr>
-        </p:nvSpPr>
-        <p:spPr>
-          <a:xfrm>
-            <a:off x="685800" y="4343400"/>
-            <a:ext cx="5486400" cy="4114800"/>
-          </a:xfrm>
-          <a:prstGeom prst="rect">
-            <a:avLst/>
-          </a:prstGeom>
-        </p:spPr>
-        <p:txBody>
-          <a:bodyPr spcFirstLastPara="1" wrap="square" lIns="91425" tIns="91425" rIns="91425" bIns="91425" anchor="t" anchorCtr="0">
-            <a:noAutofit/>
-          </a:bodyPr>
-          <a:lstStyle/>
-          <a:p>
-            <a:pPr marL="0" lvl="0" indent="0" algn="l" rtl="0">
-              <a:spcBef>
-                <a:spcPts val="0"/>
-              </a:spcBef>
-              <a:spcAft>
-                <a:spcPts val="0"/>
-              </a:spcAft>
-              <a:buNone/>
-            </a:pPr>
-            <a:endParaRPr/>
-          </a:p>
-        </p:txBody>
-      </p:sp>
-      <p:sp>
-        <p:nvSpPr>
-          <p:cNvPr id="308" name="Google Shape;308;p15:notes"/>
-          <p:cNvSpPr>
-            <a:spLocks noGrp="1" noRot="1" noChangeAspect="1"/>
-          </p:cNvSpPr>
-          <p:nvPr>
-            <p:ph type="sldImg" idx="2"/>
-          </p:nvPr>
-        </p:nvSpPr>
-        <p:spPr>
-          <a:xfrm>
-            <a:off x="381000" y="685800"/>
-            <a:ext cx="6096000" cy="3429000"/>
-          </a:xfrm>
-          <a:custGeom>
-            <a:avLst/>
-            <a:gdLst/>
-            <a:ahLst/>
-            <a:cxnLst/>
-            <a:rect l="l" t="t" r="r" b="b"/>
-            <a:pathLst>
-              <a:path w="120000" h="120000" extrusionOk="0">
-                <a:moveTo>
-                  <a:pt x="0" y="0"/>
-                </a:moveTo>
-                <a:lnTo>
-                  <a:pt x="120000" y="0"/>
-                </a:lnTo>
-                <a:lnTo>
-                  <a:pt x="120000" y="120000"/>
-                </a:lnTo>
-                <a:lnTo>
-                  <a:pt x="0" y="120000"/>
-                </a:lnTo>
-                <a:close/>
-              </a:path>
-            </a:pathLst>
-          </a:custGeom>
-        </p:spPr>
-      </p:sp>
-    </p:spTree>
-  </p:cSld>
-  <p:clrMapOvr>
-    <a:masterClrMapping/>
-  </p:clrMapOvr>
-</p:notes>
-</file>
-
-<file path=ppt/notesSlides/notesSlide14.xml><?xml version="1.0" encoding="utf-8"?>
+<file path=ppt/notesSlides/notesSlide11.xml><?xml version="1.0" encoding="utf-8"?>
 <p:notes xmlns:a="http://schemas.openxmlformats.org/drawingml/2006/main" xmlns:r="http://schemas.openxmlformats.org/officeDocument/2006/relationships" xmlns:p="http://schemas.openxmlformats.org/presentationml/2006/main" showMasterSp="0" showMasterPhAnim="0">
   <p:cSld>
     <p:spTree>
@@ -1350,7 +1035,7 @@
 </p:notes>
 </file>
 
-<file path=ppt/notesSlides/notesSlide15.xml><?xml version="1.0" encoding="utf-8"?>
+<file path=ppt/notesSlides/notesSlide12.xml><?xml version="1.0" encoding="utf-8"?>
 <p:notes xmlns:a="http://schemas.openxmlformats.org/drawingml/2006/main" xmlns:r="http://schemas.openxmlformats.org/officeDocument/2006/relationships" xmlns:p="http://schemas.openxmlformats.org/presentationml/2006/main" showMasterSp="0" showMasterPhAnim="0">
   <p:cSld>
     <p:spTree>
@@ -1454,111 +1139,7 @@
 </p:notes>
 </file>
 
-<file path=ppt/notesSlides/notesSlide16.xml><?xml version="1.0" encoding="utf-8"?>
-<p:notes xmlns:a="http://schemas.openxmlformats.org/drawingml/2006/main" xmlns:r="http://schemas.openxmlformats.org/officeDocument/2006/relationships" xmlns:p="http://schemas.openxmlformats.org/presentationml/2006/main" showMasterSp="0" showMasterPhAnim="0">
-  <p:cSld>
-    <p:spTree>
-      <p:nvGrpSpPr>
-        <p:cNvPr id="1" name="Shape 363"/>
-        <p:cNvGrpSpPr/>
-        <p:nvPr/>
-      </p:nvGrpSpPr>
-      <p:grpSpPr>
-        <a:xfrm>
-          <a:off x="0" y="0"/>
-          <a:ext cx="0" cy="0"/>
-          <a:chOff x="0" y="0"/>
-          <a:chExt cx="0" cy="0"/>
-        </a:xfrm>
-      </p:grpSpPr>
-      <p:sp>
-        <p:nvSpPr>
-          <p:cNvPr id="364" name="Google Shape;364;p19:notes"/>
-          <p:cNvSpPr txBox="1">
-            <a:spLocks noGrp="1"/>
-          </p:cNvSpPr>
-          <p:nvPr>
-            <p:ph type="body" idx="1"/>
-          </p:nvPr>
-        </p:nvSpPr>
-        <p:spPr>
-          <a:xfrm>
-            <a:off x="685800" y="4343400"/>
-            <a:ext cx="5486400" cy="4114800"/>
-          </a:xfrm>
-          <a:prstGeom prst="rect">
-            <a:avLst/>
-          </a:prstGeom>
-        </p:spPr>
-        <p:txBody>
-          <a:bodyPr spcFirstLastPara="1" wrap="square" lIns="91425" tIns="91425" rIns="91425" bIns="91425" anchor="t" anchorCtr="0">
-            <a:noAutofit/>
-          </a:bodyPr>
-          <a:lstStyle/>
-          <a:p>
-            <a:pPr marL="0" lvl="0" indent="0" algn="l" rtl="0">
-              <a:spcBef>
-                <a:spcPts val="0"/>
-              </a:spcBef>
-              <a:spcAft>
-                <a:spcPts val="0"/>
-              </a:spcAft>
-              <a:buNone/>
-            </a:pPr>
-            <a:endParaRPr/>
-          </a:p>
-        </p:txBody>
-      </p:sp>
-      <p:sp>
-        <p:nvSpPr>
-          <p:cNvPr id="365" name="Google Shape;365;p19:notes"/>
-          <p:cNvSpPr>
-            <a:spLocks noGrp="1" noRot="1" noChangeAspect="1"/>
-          </p:cNvSpPr>
-          <p:nvPr>
-            <p:ph type="sldImg" idx="2"/>
-          </p:nvPr>
-        </p:nvSpPr>
-        <p:spPr>
-          <a:xfrm>
-            <a:off x="381000" y="685800"/>
-            <a:ext cx="6096000" cy="3429000"/>
-          </a:xfrm>
-          <a:custGeom>
-            <a:avLst/>
-            <a:gdLst/>
-            <a:ahLst/>
-            <a:cxnLst/>
-            <a:rect l="l" t="t" r="r" b="b"/>
-            <a:pathLst>
-              <a:path w="120000" h="120000" extrusionOk="0">
-                <a:moveTo>
-                  <a:pt x="0" y="0"/>
-                </a:moveTo>
-                <a:lnTo>
-                  <a:pt x="120000" y="0"/>
-                </a:lnTo>
-                <a:lnTo>
-                  <a:pt x="120000" y="120000"/>
-                </a:lnTo>
-                <a:lnTo>
-                  <a:pt x="0" y="120000"/>
-                </a:lnTo>
-                <a:close/>
-              </a:path>
-            </a:pathLst>
-          </a:custGeom>
-        </p:spPr>
-      </p:sp>
-    </p:spTree>
-  </p:cSld>
-  <p:clrMapOvr>
-    <a:masterClrMapping/>
-  </p:clrMapOvr>
-</p:notes>
-</file>
-
-<file path=ppt/notesSlides/notesSlide17.xml><?xml version="1.0" encoding="utf-8"?>
+<file path=ppt/notesSlides/notesSlide13.xml><?xml version="1.0" encoding="utf-8"?>
 <p:notes xmlns:a="http://schemas.openxmlformats.org/drawingml/2006/main" xmlns:r="http://schemas.openxmlformats.org/officeDocument/2006/relationships" xmlns:p="http://schemas.openxmlformats.org/presentationml/2006/main" showMasterSp="0" showMasterPhAnim="0">
   <p:cSld>
     <p:spTree>
@@ -2187,7 +1768,7 @@
   <p:cSld>
     <p:spTree>
       <p:nvGrpSpPr>
-        <p:cNvPr id="1" name="Shape 205"/>
+        <p:cNvPr id="1" name="Shape 231"/>
         <p:cNvGrpSpPr/>
         <p:nvPr/>
       </p:nvGrpSpPr>
@@ -2201,7 +1782,7 @@
       </p:grpSpPr>
       <p:sp>
         <p:nvSpPr>
-          <p:cNvPr id="206" name="Google Shape;206;p9:notes"/>
+          <p:cNvPr id="232" name="Google Shape;232;p11:notes"/>
           <p:cNvSpPr txBox="1">
             <a:spLocks noGrp="1"/>
           </p:cNvSpPr>
@@ -2239,7 +1820,7 @@
       </p:sp>
       <p:sp>
         <p:nvSpPr>
-          <p:cNvPr id="207" name="Google Shape;207;p9:notes"/>
+          <p:cNvPr id="233" name="Google Shape;233;p11:notes"/>
           <p:cNvSpPr>
             <a:spLocks noGrp="1" noRot="1" noChangeAspect="1"/>
           </p:cNvSpPr>
@@ -2291,7 +1872,7 @@
   <p:cSld>
     <p:spTree>
       <p:nvGrpSpPr>
-        <p:cNvPr id="1" name="Shape 223"/>
+        <p:cNvPr id="1" name="Shape 253"/>
         <p:cNvGrpSpPr/>
         <p:nvPr/>
       </p:nvGrpSpPr>
@@ -2305,7 +1886,7 @@
       </p:grpSpPr>
       <p:sp>
         <p:nvSpPr>
-          <p:cNvPr id="224" name="Google Shape;224;p10:notes"/>
+          <p:cNvPr id="254" name="Google Shape;254;p12:notes"/>
           <p:cNvSpPr txBox="1">
             <a:spLocks noGrp="1"/>
           </p:cNvSpPr>
@@ -2343,7 +1924,7 @@
       </p:sp>
       <p:sp>
         <p:nvSpPr>
-          <p:cNvPr id="225" name="Google Shape;225;p10:notes"/>
+          <p:cNvPr id="255" name="Google Shape;255;p12:notes"/>
           <p:cNvSpPr>
             <a:spLocks noGrp="1" noRot="1" noChangeAspect="1"/>
           </p:cNvSpPr>
@@ -2395,7 +1976,7 @@
   <p:cSld>
     <p:spTree>
       <p:nvGrpSpPr>
-        <p:cNvPr id="1" name="Shape 231"/>
+        <p:cNvPr id="1" name="Shape 272"/>
         <p:cNvGrpSpPr/>
         <p:nvPr/>
       </p:nvGrpSpPr>
@@ -2409,7 +1990,7 @@
       </p:grpSpPr>
       <p:sp>
         <p:nvSpPr>
-          <p:cNvPr id="232" name="Google Shape;232;p11:notes"/>
+          <p:cNvPr id="273" name="Google Shape;273;p13:notes"/>
           <p:cNvSpPr txBox="1">
             <a:spLocks noGrp="1"/>
           </p:cNvSpPr>
@@ -2447,7 +2028,7 @@
       </p:sp>
       <p:sp>
         <p:nvSpPr>
-          <p:cNvPr id="233" name="Google Shape;233;p11:notes"/>
+          <p:cNvPr id="274" name="Google Shape;274;p13:notes"/>
           <p:cNvSpPr>
             <a:spLocks noGrp="1" noRot="1" noChangeAspect="1"/>
           </p:cNvSpPr>
@@ -12950,17 +12531,9 @@
 <file path=ppt/slides/slide10.xml><?xml version="1.0" encoding="utf-8"?>
 <p:sld xmlns:a="http://schemas.openxmlformats.org/drawingml/2006/main" xmlns:r="http://schemas.openxmlformats.org/officeDocument/2006/relationships" xmlns:p="http://schemas.openxmlformats.org/presentationml/2006/main">
   <p:cSld>
-    <p:bg>
-      <p:bgPr>
-        <a:solidFill>
-          <a:srgbClr val="FFFFFF"/>
-        </a:solidFill>
-        <a:effectLst/>
-      </p:bgPr>
-    </p:bg>
     <p:spTree>
       <p:nvGrpSpPr>
-        <p:cNvPr id="1" name="Shape 256"/>
+        <p:cNvPr id="1" name=""/>
         <p:cNvGrpSpPr/>
         <p:nvPr/>
       </p:nvGrpSpPr>
@@ -12972,1040 +12545,815 @@
           <a:chExt cx="0" cy="0"/>
         </a:xfrm>
       </p:grpSpPr>
-      <p:pic>
-        <p:nvPicPr>
-          <p:cNvPr id="257" name="Google Shape;257;p24" descr="image.png"/>
-          <p:cNvPicPr preferRelativeResize="0"/>
-          <p:nvPr/>
-        </p:nvPicPr>
-        <p:blipFill rotWithShape="1">
-          <a:blip r:embed="rId3">
-            <a:alphaModFix/>
-          </a:blip>
-          <a:srcRect/>
-          <a:stretch/>
-        </p:blipFill>
-        <p:spPr>
-          <a:xfrm>
-            <a:off x="0" y="0"/>
-            <a:ext cx="12192000" cy="6858000"/>
-          </a:xfrm>
-          <a:prstGeom prst="rect">
-            <a:avLst/>
-          </a:prstGeom>
-          <a:noFill/>
-          <a:ln>
-            <a:noFill/>
-          </a:ln>
-        </p:spPr>
-      </p:pic>
-      <p:pic>
-        <p:nvPicPr>
-          <p:cNvPr id="259" name="Google Shape;259;p24" descr="image.png"/>
-          <p:cNvPicPr preferRelativeResize="0"/>
-          <p:nvPr/>
-        </p:nvPicPr>
-        <p:blipFill rotWithShape="1">
-          <a:blip r:embed="rId4">
-            <a:alphaModFix/>
-          </a:blip>
-          <a:srcRect/>
-          <a:stretch/>
-        </p:blipFill>
-        <p:spPr>
-          <a:xfrm>
-            <a:off x="4361798" y="2182652"/>
-            <a:ext cx="2682951" cy="2693877"/>
-          </a:xfrm>
-          <a:prstGeom prst="rect">
-            <a:avLst/>
-          </a:prstGeom>
-          <a:noFill/>
-          <a:ln>
-            <a:noFill/>
-          </a:ln>
-        </p:spPr>
-      </p:pic>
       <p:sp>
         <p:nvSpPr>
-          <p:cNvPr id="263" name="Google Shape;263;p24"/>
+          <p:cNvPr id="3" name="TextBox 2"/>
           <p:cNvSpPr txBox="1"/>
           <p:nvPr/>
         </p:nvSpPr>
         <p:spPr>
           <a:xfrm>
-            <a:off x="4444441" y="2939509"/>
-            <a:ext cx="2117658" cy="276999"/>
+            <a:off x="689611" y="402999"/>
+            <a:ext cx="9405139" cy="584775"/>
           </a:xfrm>
           <a:prstGeom prst="rect">
             <a:avLst/>
           </a:prstGeom>
           <a:noFill/>
-          <a:ln>
-            <a:noFill/>
-          </a:ln>
         </p:spPr>
         <p:txBody>
-          <a:bodyPr spcFirstLastPara="1" wrap="square" lIns="0" tIns="0" rIns="0" bIns="0" anchor="t" anchorCtr="0">
+          <a:bodyPr wrap="none">
             <a:spAutoFit/>
           </a:bodyPr>
           <a:lstStyle/>
           <a:p>
-            <a:pPr marL="0" marR="0" lvl="0" indent="0" algn="ctr" rtl="0">
-              <a:spcBef>
-                <a:spcPts val="0"/>
-              </a:spcBef>
-              <a:spcAft>
-                <a:spcPts val="0"/>
-              </a:spcAft>
-              <a:buNone/>
-            </a:pPr>
             <a:r>
-              <a:rPr lang="en-US" sz="1800" b="1" i="0" u="none" strike="noStrike" cap="none" dirty="0">
-                <a:solidFill>
-                  <a:schemeClr val="tx1"/>
-                </a:solidFill>
-                <a:latin typeface="+mn-lt"/>
-                <a:ea typeface="Merriweather"/>
-                <a:cs typeface="Merriweather"/>
-                <a:sym typeface="Merriweather"/>
-              </a:rPr>
-              <a:t>SEER Summary</a:t>
-            </a:r>
-            <a:endParaRPr dirty="0">
-              <a:solidFill>
-                <a:schemeClr val="tx1"/>
-              </a:solidFill>
-              <a:latin typeface="+mn-lt"/>
-            </a:endParaRPr>
-          </a:p>
-        </p:txBody>
-      </p:sp>
-      <p:pic>
-        <p:nvPicPr>
-          <p:cNvPr id="268" name="Google Shape;268;p24" descr="image.png"/>
-          <p:cNvPicPr preferRelativeResize="0"/>
-          <p:nvPr/>
-        </p:nvPicPr>
-        <p:blipFill rotWithShape="1">
-          <a:blip r:embed="rId5">
-            <a:alphaModFix/>
-          </a:blip>
-          <a:srcRect/>
-          <a:stretch/>
-        </p:blipFill>
-        <p:spPr>
-          <a:xfrm>
-            <a:off x="4869116" y="2274374"/>
-            <a:ext cx="785888" cy="620500"/>
-          </a:xfrm>
-          <a:prstGeom prst="rect">
-            <a:avLst/>
-          </a:prstGeom>
-          <a:noFill/>
-          <a:ln>
-            <a:noFill/>
-          </a:ln>
-        </p:spPr>
-      </p:pic>
-      <p:sp>
-        <p:nvSpPr>
-          <p:cNvPr id="270" name="Google Shape;270;p24"/>
-          <p:cNvSpPr txBox="1"/>
-          <p:nvPr/>
-        </p:nvSpPr>
-        <p:spPr>
-          <a:xfrm>
-            <a:off x="442913" y="376875"/>
-            <a:ext cx="7975737" cy="553998"/>
-          </a:xfrm>
-          <a:prstGeom prst="rect">
-            <a:avLst/>
-          </a:prstGeom>
-          <a:noFill/>
-          <a:ln>
-            <a:noFill/>
-          </a:ln>
-        </p:spPr>
-        <p:txBody>
-          <a:bodyPr spcFirstLastPara="1" wrap="square" lIns="0" tIns="0" rIns="0" bIns="0" anchor="t" anchorCtr="0">
-            <a:spAutoFit/>
-          </a:bodyPr>
-          <a:lstStyle/>
-          <a:p>
-            <a:pPr marL="0" marR="0" lvl="0" indent="0" algn="l" rtl="0">
-              <a:spcBef>
-                <a:spcPts val="0"/>
-              </a:spcBef>
-              <a:spcAft>
-                <a:spcPts val="0"/>
-              </a:spcAft>
-              <a:buNone/>
-            </a:pPr>
-            <a:r>
-              <a:rPr lang="en-US" sz="3600" b="1" i="0" u="none" strike="noStrike" cap="none" dirty="0">
+              <a:rPr sz="3200" b="1" dirty="0">
                 <a:solidFill>
                   <a:schemeClr val="bg2">
                     <a:lumMod val="60000"/>
                     <a:lumOff val="40000"/>
                   </a:schemeClr>
                 </a:solidFill>
-                <a:latin typeface="+mn-lt"/>
-                <a:ea typeface="Merriweather"/>
-                <a:cs typeface="Merriweather"/>
-                <a:sym typeface="Merriweather"/>
               </a:rPr>
-              <a:t>Staging &amp; Rules</a:t>
+              <a:t>Surveillance Data Workflow: The Data Lifecycle</a:t>
             </a:r>
-            <a:endParaRPr dirty="0">
-              <a:solidFill>
-                <a:schemeClr val="bg2">
-                  <a:lumMod val="60000"/>
-                  <a:lumOff val="40000"/>
-                </a:schemeClr>
-              </a:solidFill>
-              <a:latin typeface="+mn-lt"/>
-            </a:endParaRPr>
           </a:p>
         </p:txBody>
       </p:sp>
-      <p:pic>
-        <p:nvPicPr>
-          <p:cNvPr id="3" name="Google Shape;259;p24" descr="image.png">
+      <p:grpSp>
+        <p:nvGrpSpPr>
+          <p:cNvPr id="2" name="Group 1">
             <a:extLst>
               <a:ext uri="{FF2B5EF4-FFF2-40B4-BE49-F238E27FC236}">
-                <a16:creationId xmlns:a16="http://schemas.microsoft.com/office/drawing/2014/main" id="{D6CB14F1-A39B-FC91-3783-82852922B483}"/>
+                <a16:creationId xmlns:a16="http://schemas.microsoft.com/office/drawing/2014/main" id="{805AA1BB-6080-F037-F9FD-1A317045B6E4}"/>
               </a:ext>
             </a:extLst>
           </p:cNvPr>
-          <p:cNvPicPr preferRelativeResize="0"/>
+          <p:cNvGrpSpPr/>
           <p:nvPr/>
-        </p:nvPicPr>
-        <p:blipFill rotWithShape="1">
-          <a:blip r:embed="rId4">
-            <a:alphaModFix/>
-          </a:blip>
-          <a:srcRect/>
-          <a:stretch/>
-        </p:blipFill>
-        <p:spPr>
-          <a:xfrm>
-            <a:off x="804970" y="2182652"/>
-            <a:ext cx="2682951" cy="2693877"/>
-          </a:xfrm>
-          <a:prstGeom prst="rect">
-            <a:avLst/>
-          </a:prstGeom>
-          <a:noFill/>
-          <a:ln>
-            <a:noFill/>
-          </a:ln>
-        </p:spPr>
-      </p:pic>
-      <p:sp>
-        <p:nvSpPr>
-          <p:cNvPr id="4" name="Google Shape;261;p24">
-            <a:extLst>
-              <a:ext uri="{FF2B5EF4-FFF2-40B4-BE49-F238E27FC236}">
-                <a16:creationId xmlns:a16="http://schemas.microsoft.com/office/drawing/2014/main" id="{377CC6BF-3336-6AA5-8816-1E4488CAAB50}"/>
-              </a:ext>
-            </a:extLst>
-          </p:cNvPr>
-          <p:cNvSpPr txBox="1"/>
-          <p:nvPr/>
-        </p:nvSpPr>
-        <p:spPr>
-          <a:xfrm>
-            <a:off x="804971" y="3070752"/>
-            <a:ext cx="1817205" cy="276999"/>
-          </a:xfrm>
-          <a:prstGeom prst="rect">
-            <a:avLst/>
-          </a:prstGeom>
-          <a:noFill/>
-          <a:ln>
-            <a:noFill/>
-          </a:ln>
-        </p:spPr>
-        <p:txBody>
-          <a:bodyPr spcFirstLastPara="1" wrap="square" lIns="0" tIns="0" rIns="0" bIns="0" anchor="t" anchorCtr="0">
-            <a:spAutoFit/>
-          </a:bodyPr>
-          <a:lstStyle/>
-          <a:p>
-            <a:pPr marL="0" marR="0" lvl="0" indent="0" algn="ctr" rtl="0">
-              <a:spcBef>
-                <a:spcPts val="0"/>
-              </a:spcBef>
-              <a:spcAft>
-                <a:spcPts val="0"/>
-              </a:spcAft>
-              <a:buNone/>
-            </a:pPr>
-            <a:r>
-              <a:rPr lang="en-US" sz="1800" b="1" i="0" u="none" strike="noStrike" cap="none" dirty="0">
+        </p:nvGrpSpPr>
+        <p:grpSpPr>
+          <a:xfrm>
+            <a:off x="1855470" y="2038886"/>
+            <a:ext cx="7680960" cy="3218914"/>
+            <a:chOff x="1981200" y="1810286"/>
+            <a:chExt cx="7680960" cy="3218914"/>
+          </a:xfrm>
+        </p:grpSpPr>
+        <p:sp>
+          <p:nvSpPr>
+            <p:cNvPr id="5" name="Rounded Rectangle 4"/>
+            <p:cNvSpPr/>
+            <p:nvPr/>
+          </p:nvSpPr>
+          <p:spPr>
+            <a:xfrm>
+              <a:off x="1981200" y="1828800"/>
+              <a:ext cx="2194560" cy="1005840"/>
+            </a:xfrm>
+            <a:prstGeom prst="roundRect">
+              <a:avLst/>
+            </a:prstGeom>
+            <a:solidFill>
+              <a:schemeClr val="bg1">
+                <a:lumMod val="85000"/>
+              </a:schemeClr>
+            </a:solidFill>
+            <a:ln w="38100">
+              <a:solidFill>
+                <a:schemeClr val="tx1"/>
+              </a:solidFill>
+            </a:ln>
+          </p:spPr>
+          <p:style>
+            <a:lnRef idx="1">
+              <a:schemeClr val="accent1"/>
+            </a:lnRef>
+            <a:fillRef idx="3">
+              <a:schemeClr val="accent1"/>
+            </a:fillRef>
+            <a:effectRef idx="2">
+              <a:schemeClr val="accent1"/>
+            </a:effectRef>
+            <a:fontRef idx="minor">
+              <a:schemeClr val="lt1"/>
+            </a:fontRef>
+          </p:style>
+          <p:txBody>
+            <a:bodyPr rtlCol="0" anchor="ctr"/>
+            <a:lstStyle/>
+            <a:p>
+              <a:pPr algn="ctr"/>
+              <a:r>
+                <a:rPr sz="1600" b="1" dirty="0">
+                  <a:solidFill>
+                    <a:schemeClr val="tx1"/>
+                  </a:solidFill>
+                </a:rPr>
+                <a:t>🔍 1. FIND</a:t>
+              </a:r>
+            </a:p>
+            <a:p>
+              <a:pPr algn="ctr"/>
+              <a:r>
+                <a:rPr sz="1600" dirty="0">
+                  <a:solidFill>
+                    <a:schemeClr val="tx1"/>
+                  </a:solidFill>
+                </a:rPr>
+                <a:t>Case Finding</a:t>
+              </a:r>
+            </a:p>
+          </p:txBody>
+        </p:sp>
+        <p:sp>
+          <p:nvSpPr>
+            <p:cNvPr id="6" name="Rounded Rectangle 5"/>
+            <p:cNvSpPr/>
+            <p:nvPr/>
+          </p:nvSpPr>
+          <p:spPr>
+            <a:xfrm>
+              <a:off x="4724400" y="1828800"/>
+              <a:ext cx="2194560" cy="1005840"/>
+            </a:xfrm>
+            <a:prstGeom prst="roundRect">
+              <a:avLst/>
+            </a:prstGeom>
+            <a:solidFill>
+              <a:schemeClr val="bg1">
+                <a:lumMod val="85000"/>
+              </a:schemeClr>
+            </a:solidFill>
+            <a:ln w="38100">
+              <a:solidFill>
+                <a:schemeClr val="tx1"/>
+              </a:solidFill>
+            </a:ln>
+          </p:spPr>
+          <p:style>
+            <a:lnRef idx="1">
+              <a:schemeClr val="accent1"/>
+            </a:lnRef>
+            <a:fillRef idx="3">
+              <a:schemeClr val="accent1"/>
+            </a:fillRef>
+            <a:effectRef idx="2">
+              <a:schemeClr val="accent1"/>
+            </a:effectRef>
+            <a:fontRef idx="minor">
+              <a:schemeClr val="lt1"/>
+            </a:fontRef>
+          </p:style>
+          <p:txBody>
+            <a:bodyPr rtlCol="0" anchor="ctr"/>
+            <a:lstStyle/>
+            <a:p>
+              <a:pPr algn="ctr"/>
+              <a:r>
+                <a:rPr sz="1600" b="1" dirty="0">
+                  <a:solidFill>
+                    <a:schemeClr val="tx1"/>
+                  </a:solidFill>
+                </a:rPr>
+                <a:t>✅ 2. VERIFY</a:t>
+              </a:r>
+            </a:p>
+            <a:p>
+              <a:pPr algn="ctr"/>
+              <a:r>
+                <a:rPr sz="1600" dirty="0">
+                  <a:solidFill>
+                    <a:schemeClr val="tx1"/>
+                  </a:solidFill>
+                </a:rPr>
+                <a:t>Eligibility</a:t>
+              </a:r>
+            </a:p>
+          </p:txBody>
+        </p:sp>
+        <p:sp>
+          <p:nvSpPr>
+            <p:cNvPr id="7" name="Rounded Rectangle 6"/>
+            <p:cNvSpPr/>
+            <p:nvPr/>
+          </p:nvSpPr>
+          <p:spPr>
+            <a:xfrm>
+              <a:off x="7467600" y="1828800"/>
+              <a:ext cx="2194560" cy="1005840"/>
+            </a:xfrm>
+            <a:prstGeom prst="roundRect">
+              <a:avLst/>
+            </a:prstGeom>
+            <a:solidFill>
+              <a:schemeClr val="bg1">
+                <a:lumMod val="85000"/>
+              </a:schemeClr>
+            </a:solidFill>
+            <a:ln w="38100">
+              <a:solidFill>
+                <a:schemeClr val="tx1"/>
+              </a:solidFill>
+            </a:ln>
+          </p:spPr>
+          <p:style>
+            <a:lnRef idx="1">
+              <a:schemeClr val="accent1"/>
+            </a:lnRef>
+            <a:fillRef idx="3">
+              <a:schemeClr val="accent1"/>
+            </a:fillRef>
+            <a:effectRef idx="2">
+              <a:schemeClr val="accent1"/>
+            </a:effectRef>
+            <a:fontRef idx="minor">
+              <a:schemeClr val="lt1"/>
+            </a:fontRef>
+          </p:style>
+          <p:txBody>
+            <a:bodyPr rtlCol="0" anchor="ctr"/>
+            <a:lstStyle/>
+            <a:p>
+              <a:pPr algn="ctr"/>
+              <a:r>
+                <a:rPr sz="1600" b="1" dirty="0">
+                  <a:solidFill>
+                    <a:schemeClr val="tx1"/>
+                  </a:solidFill>
+                </a:rPr>
+                <a:t>📝 3. CODE</a:t>
+              </a:r>
+            </a:p>
+            <a:p>
+              <a:pPr algn="ctr"/>
+              <a:r>
+                <a:rPr sz="1600" dirty="0">
+                  <a:solidFill>
+                    <a:schemeClr val="tx1"/>
+                  </a:solidFill>
+                </a:rPr>
+                <a:t>Abstraction</a:t>
+              </a:r>
+            </a:p>
+          </p:txBody>
+        </p:sp>
+        <p:sp>
+          <p:nvSpPr>
+            <p:cNvPr id="8" name="Rounded Rectangle 7"/>
+            <p:cNvSpPr/>
+            <p:nvPr/>
+          </p:nvSpPr>
+          <p:spPr>
+            <a:xfrm>
+              <a:off x="7467600" y="4023360"/>
+              <a:ext cx="2194560" cy="1005840"/>
+            </a:xfrm>
+            <a:prstGeom prst="roundRect">
+              <a:avLst/>
+            </a:prstGeom>
+            <a:solidFill>
+              <a:schemeClr val="bg1">
+                <a:lumMod val="85000"/>
+              </a:schemeClr>
+            </a:solidFill>
+            <a:ln w="38100">
+              <a:solidFill>
+                <a:schemeClr val="tx1"/>
+              </a:solidFill>
+            </a:ln>
+          </p:spPr>
+          <p:style>
+            <a:lnRef idx="1">
+              <a:schemeClr val="accent1"/>
+            </a:lnRef>
+            <a:fillRef idx="3">
+              <a:schemeClr val="accent1"/>
+            </a:fillRef>
+            <a:effectRef idx="2">
+              <a:schemeClr val="accent1"/>
+            </a:effectRef>
+            <a:fontRef idx="minor">
+              <a:schemeClr val="lt1"/>
+            </a:fontRef>
+          </p:style>
+          <p:txBody>
+            <a:bodyPr rtlCol="0" anchor="ctr"/>
+            <a:lstStyle/>
+            <a:p>
+              <a:pPr algn="ctr"/>
+              <a:r>
+                <a:rPr sz="1600" b="1">
+                  <a:solidFill>
+                    <a:schemeClr val="tx1"/>
+                  </a:solidFill>
+                </a:rPr>
+                <a:t>🔬 4. CHECK</a:t>
+              </a:r>
+            </a:p>
+            <a:p>
+              <a:pPr algn="ctr"/>
+              <a:r>
+                <a:rPr sz="1600">
+                  <a:solidFill>
+                    <a:schemeClr val="tx1"/>
+                  </a:solidFill>
+                </a:rPr>
+                <a:t>Quality Assurance</a:t>
+              </a:r>
+            </a:p>
+          </p:txBody>
+        </p:sp>
+        <p:sp>
+          <p:nvSpPr>
+            <p:cNvPr id="9" name="Rounded Rectangle 8"/>
+            <p:cNvSpPr/>
+            <p:nvPr/>
+          </p:nvSpPr>
+          <p:spPr>
+            <a:xfrm>
+              <a:off x="4724400" y="4023360"/>
+              <a:ext cx="2194560" cy="1005840"/>
+            </a:xfrm>
+            <a:prstGeom prst="roundRect">
+              <a:avLst/>
+            </a:prstGeom>
+            <a:solidFill>
+              <a:schemeClr val="bg1">
+                <a:lumMod val="85000"/>
+              </a:schemeClr>
+            </a:solidFill>
+            <a:ln w="38100">
+              <a:solidFill>
+                <a:schemeClr val="tx1"/>
+              </a:solidFill>
+            </a:ln>
+          </p:spPr>
+          <p:style>
+            <a:lnRef idx="1">
+              <a:schemeClr val="accent1"/>
+            </a:lnRef>
+            <a:fillRef idx="3">
+              <a:schemeClr val="accent1"/>
+            </a:fillRef>
+            <a:effectRef idx="2">
+              <a:schemeClr val="accent1"/>
+            </a:effectRef>
+            <a:fontRef idx="minor">
+              <a:schemeClr val="lt1"/>
+            </a:fontRef>
+          </p:style>
+          <p:txBody>
+            <a:bodyPr rtlCol="0" anchor="ctr"/>
+            <a:lstStyle/>
+            <a:p>
+              <a:pPr algn="ctr"/>
+              <a:r>
+                <a:rPr sz="1600" b="1">
+                  <a:solidFill>
+                    <a:schemeClr val="tx1"/>
+                  </a:solidFill>
+                </a:rPr>
+                <a:t>☁️ 5. SUBMIT</a:t>
+              </a:r>
+            </a:p>
+            <a:p>
+              <a:pPr algn="ctr"/>
+              <a:r>
+                <a:rPr sz="1600">
+                  <a:solidFill>
+                    <a:schemeClr val="tx1"/>
+                  </a:solidFill>
+                </a:rPr>
+                <a:t>Central Registry</a:t>
+              </a:r>
+            </a:p>
+          </p:txBody>
+        </p:sp>
+        <p:sp>
+          <p:nvSpPr>
+            <p:cNvPr id="10" name="Rounded Rectangle 9"/>
+            <p:cNvSpPr/>
+            <p:nvPr/>
+          </p:nvSpPr>
+          <p:spPr>
+            <a:xfrm>
+              <a:off x="1981200" y="4023360"/>
+              <a:ext cx="2194560" cy="1005840"/>
+            </a:xfrm>
+            <a:prstGeom prst="roundRect">
+              <a:avLst/>
+            </a:prstGeom>
+            <a:solidFill>
+              <a:schemeClr val="bg1">
+                <a:lumMod val="85000"/>
+              </a:schemeClr>
+            </a:solidFill>
+            <a:ln w="38100">
+              <a:solidFill>
+                <a:schemeClr val="tx1"/>
+              </a:solidFill>
+            </a:ln>
+          </p:spPr>
+          <p:style>
+            <a:lnRef idx="1">
+              <a:schemeClr val="accent1"/>
+            </a:lnRef>
+            <a:fillRef idx="3">
+              <a:schemeClr val="accent1"/>
+            </a:fillRef>
+            <a:effectRef idx="2">
+              <a:schemeClr val="accent1"/>
+            </a:effectRef>
+            <a:fontRef idx="minor">
+              <a:schemeClr val="lt1"/>
+            </a:fontRef>
+          </p:style>
+          <p:txBody>
+            <a:bodyPr rtlCol="0" anchor="ctr"/>
+            <a:lstStyle/>
+            <a:p>
+              <a:pPr algn="ctr"/>
+              <a:r>
+                <a:rPr sz="1600" b="1">
+                  <a:solidFill>
+                    <a:schemeClr val="tx1"/>
+                  </a:solidFill>
+                </a:rPr>
+                <a:t>📈 6. REPORT</a:t>
+              </a:r>
+            </a:p>
+            <a:p>
+              <a:pPr algn="ctr"/>
+              <a:r>
+                <a:rPr sz="1600">
+                  <a:solidFill>
+                    <a:schemeClr val="tx1"/>
+                  </a:solidFill>
+                </a:rPr>
+                <a:t>Public Action</a:t>
+              </a:r>
+            </a:p>
+          </p:txBody>
+        </p:sp>
+        <p:sp>
+          <p:nvSpPr>
+            <p:cNvPr id="11" name="Right Arrow 10"/>
+            <p:cNvSpPr/>
+            <p:nvPr/>
+          </p:nvSpPr>
+          <p:spPr>
+            <a:xfrm>
+              <a:off x="4175760" y="2148840"/>
+              <a:ext cx="548640" cy="365760"/>
+            </a:xfrm>
+            <a:prstGeom prst="rightArrow">
+              <a:avLst/>
+            </a:prstGeom>
+            <a:solidFill>
+              <a:schemeClr val="bg1">
+                <a:lumMod val="85000"/>
+              </a:schemeClr>
+            </a:solidFill>
+            <a:ln w="38100">
+              <a:solidFill>
+                <a:schemeClr val="tx1"/>
+              </a:solidFill>
+            </a:ln>
+          </p:spPr>
+          <p:style>
+            <a:lnRef idx="1">
+              <a:schemeClr val="accent1"/>
+            </a:lnRef>
+            <a:fillRef idx="3">
+              <a:schemeClr val="accent1"/>
+            </a:fillRef>
+            <a:effectRef idx="2">
+              <a:schemeClr val="accent1"/>
+            </a:effectRef>
+            <a:fontRef idx="minor">
+              <a:schemeClr val="lt1"/>
+            </a:fontRef>
+          </p:style>
+          <p:txBody>
+            <a:bodyPr rtlCol="0" anchor="ctr"/>
+            <a:lstStyle/>
+            <a:p>
+              <a:pPr algn="ctr"/>
+              <a:endParaRPr sz="1600">
                 <a:solidFill>
                   <a:schemeClr val="tx1"/>
                 </a:solidFill>
-                <a:latin typeface="+mn-lt"/>
-                <a:ea typeface="Merriweather"/>
-                <a:cs typeface="Merriweather"/>
-                <a:sym typeface="Merriweather"/>
-              </a:rPr>
-              <a:t>TNM Staging</a:t>
-            </a:r>
-            <a:endParaRPr dirty="0">
+              </a:endParaRPr>
+            </a:p>
+          </p:txBody>
+        </p:sp>
+        <p:sp>
+          <p:nvSpPr>
+            <p:cNvPr id="12" name="Right Arrow 11"/>
+            <p:cNvSpPr/>
+            <p:nvPr/>
+          </p:nvSpPr>
+          <p:spPr>
+            <a:xfrm>
+              <a:off x="6918960" y="2148840"/>
+              <a:ext cx="548640" cy="365760"/>
+            </a:xfrm>
+            <a:prstGeom prst="rightArrow">
+              <a:avLst/>
+            </a:prstGeom>
+            <a:solidFill>
+              <a:schemeClr val="bg1">
+                <a:lumMod val="85000"/>
+              </a:schemeClr>
+            </a:solidFill>
+            <a:ln w="38100">
               <a:solidFill>
                 <a:schemeClr val="tx1"/>
               </a:solidFill>
-              <a:latin typeface="+mn-lt"/>
-            </a:endParaRPr>
-          </a:p>
-        </p:txBody>
-      </p:sp>
-      <p:sp>
-        <p:nvSpPr>
-          <p:cNvPr id="5" name="Google Shape;262;p24">
-            <a:extLst>
-              <a:ext uri="{FF2B5EF4-FFF2-40B4-BE49-F238E27FC236}">
-                <a16:creationId xmlns:a16="http://schemas.microsoft.com/office/drawing/2014/main" id="{A35AE16C-F967-78F4-7A32-F5B5918A43C1}"/>
-              </a:ext>
-            </a:extLst>
-          </p:cNvPr>
-          <p:cNvSpPr txBox="1"/>
-          <p:nvPr/>
-        </p:nvSpPr>
-        <p:spPr>
-          <a:xfrm>
-            <a:off x="1395864" y="3314839"/>
-            <a:ext cx="2092057" cy="1477328"/>
-          </a:xfrm>
-          <a:prstGeom prst="rect">
-            <a:avLst/>
-          </a:prstGeom>
-          <a:noFill/>
-          <a:ln>
-            <a:noFill/>
-          </a:ln>
-        </p:spPr>
-        <p:txBody>
-          <a:bodyPr spcFirstLastPara="1" wrap="square" lIns="0" tIns="0" rIns="0" bIns="0" anchor="t" anchorCtr="0">
-            <a:spAutoFit/>
-          </a:bodyPr>
-          <a:lstStyle/>
-          <a:p>
-            <a:pPr marL="285750" marR="0" lvl="0" indent="-285750" rtl="0">
-              <a:lnSpc>
-                <a:spcPct val="200000"/>
-              </a:lnSpc>
-              <a:spcBef>
-                <a:spcPts val="0"/>
-              </a:spcBef>
-              <a:spcAft>
-                <a:spcPts val="0"/>
-              </a:spcAft>
-              <a:buFont typeface="Wingdings" pitchFamily="2" charset="2"/>
-              <a:buChar char="§"/>
-            </a:pPr>
-            <a:r>
-              <a:rPr lang="en-US" sz="1600" b="1" i="0" u="none" strike="noStrike" cap="none" dirty="0">
+            </a:ln>
+          </p:spPr>
+          <p:style>
+            <a:lnRef idx="1">
+              <a:schemeClr val="accent1"/>
+            </a:lnRef>
+            <a:fillRef idx="3">
+              <a:schemeClr val="accent1"/>
+            </a:fillRef>
+            <a:effectRef idx="2">
+              <a:schemeClr val="accent1"/>
+            </a:effectRef>
+            <a:fontRef idx="minor">
+              <a:schemeClr val="lt1"/>
+            </a:fontRef>
+          </p:style>
+          <p:txBody>
+            <a:bodyPr rtlCol="0" anchor="ctr"/>
+            <a:lstStyle/>
+            <a:p>
+              <a:pPr algn="ctr"/>
+              <a:endParaRPr sz="1600">
                 <a:solidFill>
                   <a:schemeClr val="tx1"/>
                 </a:solidFill>
-                <a:latin typeface="+mn-lt"/>
-                <a:ea typeface="DM Sans"/>
-                <a:cs typeface="DM Sans"/>
-                <a:sym typeface="DM Sans"/>
-              </a:rPr>
-              <a:t>T</a:t>
-            </a:r>
-            <a:r>
-              <a:rPr lang="en-US" sz="1600" b="0" i="0" u="none" strike="noStrike" cap="none" dirty="0">
+              </a:endParaRPr>
+            </a:p>
+          </p:txBody>
+        </p:sp>
+        <p:sp>
+          <p:nvSpPr>
+            <p:cNvPr id="13" name="Down Arrow 12"/>
+            <p:cNvSpPr/>
+            <p:nvPr/>
+          </p:nvSpPr>
+          <p:spPr>
+            <a:xfrm>
+              <a:off x="8290560" y="2868930"/>
+              <a:ext cx="548640" cy="1097280"/>
+            </a:xfrm>
+            <a:prstGeom prst="downArrow">
+              <a:avLst/>
+            </a:prstGeom>
+            <a:solidFill>
+              <a:schemeClr val="bg1">
+                <a:lumMod val="85000"/>
+              </a:schemeClr>
+            </a:solidFill>
+            <a:ln w="38100">
+              <a:solidFill>
+                <a:schemeClr val="tx1"/>
+              </a:solidFill>
+            </a:ln>
+          </p:spPr>
+          <p:style>
+            <a:lnRef idx="1">
+              <a:schemeClr val="accent1"/>
+            </a:lnRef>
+            <a:fillRef idx="3">
+              <a:schemeClr val="accent1"/>
+            </a:fillRef>
+            <a:effectRef idx="2">
+              <a:schemeClr val="accent1"/>
+            </a:effectRef>
+            <a:fontRef idx="minor">
+              <a:schemeClr val="lt1"/>
+            </a:fontRef>
+          </p:style>
+          <p:txBody>
+            <a:bodyPr rtlCol="0" anchor="ctr"/>
+            <a:lstStyle/>
+            <a:p>
+              <a:pPr algn="ctr"/>
+              <a:endParaRPr sz="1600">
                 <a:solidFill>
                   <a:schemeClr val="tx1"/>
                 </a:solidFill>
-                <a:latin typeface="+mn-lt"/>
-                <a:ea typeface="DM Sans"/>
-                <a:cs typeface="DM Sans"/>
-                <a:sym typeface="DM Sans"/>
-              </a:rPr>
-              <a:t>umor size</a:t>
-            </a:r>
-            <a:endParaRPr lang="en-US" sz="1600" dirty="0">
+              </a:endParaRPr>
+            </a:p>
+          </p:txBody>
+        </p:sp>
+        <p:sp>
+          <p:nvSpPr>
+            <p:cNvPr id="14" name="Left Arrow 13"/>
+            <p:cNvSpPr/>
+            <p:nvPr/>
+          </p:nvSpPr>
+          <p:spPr>
+            <a:xfrm>
+              <a:off x="6918960" y="4343400"/>
+              <a:ext cx="548640" cy="365760"/>
+            </a:xfrm>
+            <a:prstGeom prst="leftArrow">
+              <a:avLst/>
+            </a:prstGeom>
+            <a:solidFill>
+              <a:schemeClr val="bg1">
+                <a:lumMod val="85000"/>
+              </a:schemeClr>
+            </a:solidFill>
+            <a:ln w="38100">
               <a:solidFill>
                 <a:schemeClr val="tx1"/>
               </a:solidFill>
-              <a:latin typeface="+mn-lt"/>
-              <a:ea typeface="DM Sans"/>
-              <a:cs typeface="DM Sans"/>
-              <a:sym typeface="DM Sans"/>
-            </a:endParaRPr>
-          </a:p>
-          <a:p>
-            <a:pPr marL="285750" marR="0" lvl="0" indent="-285750" rtl="0">
-              <a:lnSpc>
-                <a:spcPct val="200000"/>
-              </a:lnSpc>
-              <a:spcBef>
-                <a:spcPts val="0"/>
-              </a:spcBef>
-              <a:spcAft>
-                <a:spcPts val="0"/>
-              </a:spcAft>
-              <a:buFont typeface="Wingdings" pitchFamily="2" charset="2"/>
-              <a:buChar char="§"/>
-            </a:pPr>
-            <a:r>
-              <a:rPr lang="en-US" sz="1600" b="1" i="0" u="none" strike="noStrike" cap="none" dirty="0">
+            </a:ln>
+          </p:spPr>
+          <p:style>
+            <a:lnRef idx="1">
+              <a:schemeClr val="accent1"/>
+            </a:lnRef>
+            <a:fillRef idx="3">
+              <a:schemeClr val="accent1"/>
+            </a:fillRef>
+            <a:effectRef idx="2">
+              <a:schemeClr val="accent1"/>
+            </a:effectRef>
+            <a:fontRef idx="minor">
+              <a:schemeClr val="lt1"/>
+            </a:fontRef>
+          </p:style>
+          <p:txBody>
+            <a:bodyPr rtlCol="0" anchor="ctr"/>
+            <a:lstStyle/>
+            <a:p>
+              <a:pPr algn="ctr"/>
+              <a:endParaRPr sz="1600">
                 <a:solidFill>
                   <a:schemeClr val="tx1"/>
                 </a:solidFill>
-                <a:latin typeface="+mn-lt"/>
-                <a:ea typeface="DM Sans"/>
-                <a:cs typeface="DM Sans"/>
-                <a:sym typeface="DM Sans"/>
-              </a:rPr>
-              <a:t>N</a:t>
-            </a:r>
-            <a:r>
-              <a:rPr lang="en-US" sz="1600" b="0" i="0" u="none" strike="noStrike" cap="none" dirty="0">
+              </a:endParaRPr>
+            </a:p>
+          </p:txBody>
+        </p:sp>
+        <p:sp>
+          <p:nvSpPr>
+            <p:cNvPr id="15" name="Left Arrow 14"/>
+            <p:cNvSpPr/>
+            <p:nvPr/>
+          </p:nvSpPr>
+          <p:spPr>
+            <a:xfrm>
+              <a:off x="4175760" y="4343400"/>
+              <a:ext cx="548640" cy="365760"/>
+            </a:xfrm>
+            <a:prstGeom prst="leftArrow">
+              <a:avLst/>
+            </a:prstGeom>
+            <a:solidFill>
+              <a:schemeClr val="bg1">
+                <a:lumMod val="85000"/>
+              </a:schemeClr>
+            </a:solidFill>
+            <a:ln w="38100">
+              <a:solidFill>
+                <a:schemeClr val="tx1"/>
+              </a:solidFill>
+            </a:ln>
+          </p:spPr>
+          <p:style>
+            <a:lnRef idx="1">
+              <a:schemeClr val="accent1"/>
+            </a:lnRef>
+            <a:fillRef idx="3">
+              <a:schemeClr val="accent1"/>
+            </a:fillRef>
+            <a:effectRef idx="2">
+              <a:schemeClr val="accent1"/>
+            </a:effectRef>
+            <a:fontRef idx="minor">
+              <a:schemeClr val="lt1"/>
+            </a:fontRef>
+          </p:style>
+          <p:txBody>
+            <a:bodyPr rtlCol="0" anchor="ctr"/>
+            <a:lstStyle/>
+            <a:p>
+              <a:pPr algn="ctr"/>
+              <a:endParaRPr sz="1600">
                 <a:solidFill>
                   <a:schemeClr val="tx1"/>
                 </a:solidFill>
-                <a:latin typeface="+mn-lt"/>
-                <a:ea typeface="DM Sans"/>
-                <a:cs typeface="DM Sans"/>
-                <a:sym typeface="DM Sans"/>
-              </a:rPr>
-              <a:t>odes involved</a:t>
-            </a:r>
-            <a:endParaRPr lang="en-US" sz="1600" dirty="0">
-              <a:solidFill>
-                <a:schemeClr val="tx1"/>
-              </a:solidFill>
-              <a:latin typeface="+mn-lt"/>
-              <a:ea typeface="DM Sans"/>
-              <a:cs typeface="DM Sans"/>
-              <a:sym typeface="DM Sans"/>
-            </a:endParaRPr>
-          </a:p>
-          <a:p>
-            <a:pPr marL="285750" marR="0" lvl="0" indent="-285750" rtl="0">
-              <a:lnSpc>
-                <a:spcPct val="200000"/>
-              </a:lnSpc>
-              <a:spcBef>
-                <a:spcPts val="0"/>
-              </a:spcBef>
-              <a:spcAft>
-                <a:spcPts val="0"/>
-              </a:spcAft>
-              <a:buFont typeface="Wingdings" pitchFamily="2" charset="2"/>
-              <a:buChar char="§"/>
-            </a:pPr>
-            <a:r>
-              <a:rPr lang="en-US" sz="1600" b="1" i="0" u="none" strike="noStrike" cap="none" dirty="0">
-                <a:solidFill>
-                  <a:schemeClr val="tx1"/>
-                </a:solidFill>
-                <a:latin typeface="+mn-lt"/>
-                <a:ea typeface="DM Sans"/>
-                <a:cs typeface="DM Sans"/>
-                <a:sym typeface="DM Sans"/>
-              </a:rPr>
-              <a:t>M</a:t>
-            </a:r>
-            <a:r>
-              <a:rPr lang="en-US" sz="1600" b="0" i="0" u="none" strike="noStrike" cap="none" dirty="0">
-                <a:solidFill>
-                  <a:schemeClr val="tx1"/>
-                </a:solidFill>
-                <a:latin typeface="+mn-lt"/>
-                <a:ea typeface="DM Sans"/>
-                <a:cs typeface="DM Sans"/>
-                <a:sym typeface="DM Sans"/>
-              </a:rPr>
-              <a:t>etastasis. </a:t>
-            </a:r>
-            <a:endParaRPr sz="1600" dirty="0">
-              <a:solidFill>
-                <a:schemeClr val="tx1"/>
-              </a:solidFill>
-              <a:latin typeface="+mn-lt"/>
-            </a:endParaRPr>
-          </a:p>
-        </p:txBody>
-      </p:sp>
-      <p:pic>
-        <p:nvPicPr>
-          <p:cNvPr id="6" name="Google Shape;267;p24" descr="image.png">
-            <a:extLst>
-              <a:ext uri="{FF2B5EF4-FFF2-40B4-BE49-F238E27FC236}">
-                <a16:creationId xmlns:a16="http://schemas.microsoft.com/office/drawing/2014/main" id="{5D504EDC-4AB8-A800-1228-77F0BB879FC7}"/>
-              </a:ext>
-            </a:extLst>
-          </p:cNvPr>
-          <p:cNvPicPr preferRelativeResize="0"/>
-          <p:nvPr/>
-        </p:nvPicPr>
-        <p:blipFill rotWithShape="1">
-          <a:blip r:embed="rId6">
-            <a:alphaModFix/>
-          </a:blip>
-          <a:srcRect/>
-          <a:stretch/>
-        </p:blipFill>
-        <p:spPr>
-          <a:xfrm>
-            <a:off x="1395864" y="2290568"/>
-            <a:ext cx="804303" cy="578198"/>
-          </a:xfrm>
-          <a:prstGeom prst="rect">
-            <a:avLst/>
-          </a:prstGeom>
-          <a:noFill/>
-          <a:ln>
+              </a:endParaRPr>
+            </a:p>
+          </p:txBody>
+        </p:sp>
+        <p:sp>
+          <p:nvSpPr>
+            <p:cNvPr id="16" name="TextBox 15"/>
+            <p:cNvSpPr txBox="1"/>
+            <p:nvPr/>
+          </p:nvSpPr>
+          <p:spPr>
+            <a:xfrm>
+              <a:off x="4175761" y="1810286"/>
+              <a:ext cx="548639" cy="338554"/>
+            </a:xfrm>
+            <a:prstGeom prst="rect">
+              <a:avLst/>
+            </a:prstGeom>
             <a:noFill/>
-          </a:ln>
-        </p:spPr>
-      </p:pic>
-      <p:pic>
-        <p:nvPicPr>
-          <p:cNvPr id="10" name="Google Shape;259;p24" descr="image.png">
-            <a:extLst>
-              <a:ext uri="{FF2B5EF4-FFF2-40B4-BE49-F238E27FC236}">
-                <a16:creationId xmlns:a16="http://schemas.microsoft.com/office/drawing/2014/main" id="{DB3B5506-6BF2-3D32-9269-26B14EE35C6D}"/>
-              </a:ext>
-            </a:extLst>
-          </p:cNvPr>
-          <p:cNvPicPr preferRelativeResize="0"/>
-          <p:nvPr/>
-        </p:nvPicPr>
-        <p:blipFill rotWithShape="1">
-          <a:blip r:embed="rId4">
-            <a:alphaModFix/>
-          </a:blip>
-          <a:srcRect/>
-          <a:stretch/>
-        </p:blipFill>
-        <p:spPr>
-          <a:xfrm>
-            <a:off x="7816635" y="2182652"/>
-            <a:ext cx="2679192" cy="2697480"/>
-          </a:xfrm>
-          <a:prstGeom prst="rect">
-            <a:avLst/>
-          </a:prstGeom>
-          <a:noFill/>
-          <a:ln>
+            <a:ln w="38100">
+              <a:noFill/>
+            </a:ln>
+          </p:spPr>
+          <p:txBody>
+            <a:bodyPr wrap="square">
+              <a:spAutoFit/>
+            </a:bodyPr>
+            <a:lstStyle/>
+            <a:p>
+              <a:r>
+                <a:rPr sz="1600" b="1" dirty="0"/>
+                <a:t>QC</a:t>
+              </a:r>
+            </a:p>
+          </p:txBody>
+        </p:sp>
+        <p:sp>
+          <p:nvSpPr>
+            <p:cNvPr id="17" name="TextBox 16"/>
+            <p:cNvSpPr txBox="1"/>
+            <p:nvPr/>
+          </p:nvSpPr>
+          <p:spPr>
+            <a:xfrm>
+              <a:off x="6918960" y="1841064"/>
+              <a:ext cx="492443" cy="338554"/>
+            </a:xfrm>
+            <a:prstGeom prst="rect">
+              <a:avLst/>
+            </a:prstGeom>
             <a:noFill/>
-          </a:ln>
-        </p:spPr>
-      </p:pic>
-      <p:sp>
-        <p:nvSpPr>
-          <p:cNvPr id="11" name="Google Shape;265;p24">
-            <a:extLst>
-              <a:ext uri="{FF2B5EF4-FFF2-40B4-BE49-F238E27FC236}">
-                <a16:creationId xmlns:a16="http://schemas.microsoft.com/office/drawing/2014/main" id="{48AE9CE9-016B-DEFF-1E56-5C9EAD8B36E7}"/>
-              </a:ext>
-            </a:extLst>
-          </p:cNvPr>
-          <p:cNvSpPr txBox="1"/>
-          <p:nvPr/>
-        </p:nvSpPr>
-        <p:spPr>
-          <a:xfrm>
-            <a:off x="7827894" y="2939509"/>
-            <a:ext cx="1621807" cy="276999"/>
-          </a:xfrm>
-          <a:prstGeom prst="rect">
-            <a:avLst/>
-          </a:prstGeom>
-          <a:noFill/>
-          <a:ln>
+            <a:ln w="38100">
+              <a:noFill/>
+            </a:ln>
+          </p:spPr>
+          <p:txBody>
+            <a:bodyPr wrap="none">
+              <a:spAutoFit/>
+            </a:bodyPr>
+            <a:lstStyle/>
+            <a:p>
+              <a:r>
+                <a:rPr sz="1600" b="1"/>
+                <a:t>QC</a:t>
+              </a:r>
+            </a:p>
+          </p:txBody>
+        </p:sp>
+        <p:sp>
+          <p:nvSpPr>
+            <p:cNvPr id="18" name="TextBox 17"/>
+            <p:cNvSpPr txBox="1"/>
+            <p:nvPr/>
+          </p:nvSpPr>
+          <p:spPr>
+            <a:xfrm>
+              <a:off x="6975157" y="4004846"/>
+              <a:ext cx="492443" cy="338554"/>
+            </a:xfrm>
+            <a:prstGeom prst="rect">
+              <a:avLst/>
+            </a:prstGeom>
             <a:noFill/>
-          </a:ln>
-        </p:spPr>
-        <p:txBody>
-          <a:bodyPr spcFirstLastPara="1" wrap="square" lIns="0" tIns="0" rIns="0" bIns="0" anchor="t" anchorCtr="0">
-            <a:spAutoFit/>
-          </a:bodyPr>
-          <a:lstStyle/>
-          <a:p>
-            <a:pPr marL="0" marR="0" lvl="0" indent="0" algn="ctr" rtl="0">
-              <a:spcBef>
-                <a:spcPts val="0"/>
-              </a:spcBef>
-              <a:spcAft>
-                <a:spcPts val="0"/>
-              </a:spcAft>
-              <a:buNone/>
-            </a:pPr>
-            <a:r>
-              <a:rPr lang="en-US" sz="1800" b="1" i="0" u="none" strike="noStrike" cap="none" dirty="0">
-                <a:solidFill>
-                  <a:schemeClr val="tx1"/>
-                </a:solidFill>
-                <a:latin typeface="+mn-lt"/>
-                <a:ea typeface="Merriweather"/>
-                <a:cs typeface="Merriweather"/>
-                <a:sym typeface="Merriweather"/>
-              </a:rPr>
-              <a:t>Date Rules</a:t>
-            </a:r>
-            <a:endParaRPr dirty="0">
-              <a:solidFill>
-                <a:schemeClr val="tx1"/>
-              </a:solidFill>
-              <a:latin typeface="+mn-lt"/>
-            </a:endParaRPr>
-          </a:p>
-        </p:txBody>
-      </p:sp>
-      <p:sp>
-        <p:nvSpPr>
-          <p:cNvPr id="12" name="Google Shape;266;p24">
-            <a:extLst>
-              <a:ext uri="{FF2B5EF4-FFF2-40B4-BE49-F238E27FC236}">
-                <a16:creationId xmlns:a16="http://schemas.microsoft.com/office/drawing/2014/main" id="{7BCA4B48-CF83-31BF-4B30-C4E2D5DA6013}"/>
-              </a:ext>
-            </a:extLst>
-          </p:cNvPr>
-          <p:cNvSpPr txBox="1"/>
-          <p:nvPr/>
-        </p:nvSpPr>
-        <p:spPr>
-          <a:xfrm>
-            <a:off x="8090239" y="3234701"/>
-            <a:ext cx="2405588" cy="1477328"/>
-          </a:xfrm>
-          <a:prstGeom prst="rect">
-            <a:avLst/>
-          </a:prstGeom>
-          <a:noFill/>
-          <a:ln>
-            <a:noFill/>
-          </a:ln>
-        </p:spPr>
-        <p:txBody>
-          <a:bodyPr spcFirstLastPara="1" wrap="square" lIns="0" tIns="0" rIns="0" bIns="0" anchor="t" anchorCtr="0">
-            <a:spAutoFit/>
-          </a:bodyPr>
-          <a:lstStyle/>
-          <a:p>
-            <a:pPr marL="0" marR="0" lvl="0" indent="0" rtl="0">
-              <a:lnSpc>
-                <a:spcPct val="150000"/>
-              </a:lnSpc>
-              <a:spcBef>
-                <a:spcPts val="0"/>
-              </a:spcBef>
-              <a:spcAft>
-                <a:spcPts val="0"/>
-              </a:spcAft>
-              <a:buNone/>
-            </a:pPr>
-            <a:r>
-              <a:rPr lang="en-US" sz="1600" b="0" i="0" u="none" strike="noStrike" cap="none" dirty="0">
-                <a:solidFill>
-                  <a:schemeClr val="tx1"/>
-                </a:solidFill>
-                <a:latin typeface="+mn-lt"/>
-                <a:ea typeface="DM Sans"/>
-                <a:cs typeface="DM Sans"/>
-                <a:sym typeface="DM Sans"/>
-              </a:rPr>
-              <a:t>Anchor to the first definitive diagnosis (usually the pathology report date).</a:t>
-            </a:r>
-            <a:endParaRPr sz="1600" dirty="0">
-              <a:solidFill>
-                <a:schemeClr val="tx1"/>
-              </a:solidFill>
-              <a:latin typeface="+mn-lt"/>
-            </a:endParaRPr>
-          </a:p>
-        </p:txBody>
-      </p:sp>
-      <p:pic>
-        <p:nvPicPr>
-          <p:cNvPr id="13" name="Google Shape;269;p24" descr="image.png">
-            <a:extLst>
-              <a:ext uri="{FF2B5EF4-FFF2-40B4-BE49-F238E27FC236}">
-                <a16:creationId xmlns:a16="http://schemas.microsoft.com/office/drawing/2014/main" id="{8DA19663-403A-3594-9F79-B86BE2E16152}"/>
-              </a:ext>
-            </a:extLst>
-          </p:cNvPr>
-          <p:cNvPicPr preferRelativeResize="0"/>
-          <p:nvPr/>
-        </p:nvPicPr>
-        <p:blipFill rotWithShape="1">
-          <a:blip r:embed="rId7">
-            <a:alphaModFix/>
-          </a:blip>
-          <a:srcRect/>
-          <a:stretch/>
-        </p:blipFill>
-        <p:spPr>
-          <a:xfrm>
-            <a:off x="8418650" y="2207139"/>
-            <a:ext cx="888819" cy="687735"/>
-          </a:xfrm>
-          <a:prstGeom prst="rect">
-            <a:avLst/>
-          </a:prstGeom>
-          <a:noFill/>
-          <a:ln>
-            <a:noFill/>
-          </a:ln>
-        </p:spPr>
-      </p:pic>
-      <p:sp>
-        <p:nvSpPr>
-          <p:cNvPr id="15" name="TextBox 14">
-            <a:extLst>
-              <a:ext uri="{FF2B5EF4-FFF2-40B4-BE49-F238E27FC236}">
-                <a16:creationId xmlns:a16="http://schemas.microsoft.com/office/drawing/2014/main" id="{C5736EE3-4A7A-2CE2-E9BA-CA4B424CCFF3}"/>
-              </a:ext>
-            </a:extLst>
-          </p:cNvPr>
-          <p:cNvSpPr txBox="1"/>
-          <p:nvPr/>
-        </p:nvSpPr>
-        <p:spPr>
-          <a:xfrm>
-            <a:off x="1087666" y="5336820"/>
-            <a:ext cx="2182470" cy="785343"/>
-          </a:xfrm>
-          <a:prstGeom prst="rect">
-            <a:avLst/>
-          </a:prstGeom>
-          <a:noFill/>
-        </p:spPr>
-        <p:txBody>
-          <a:bodyPr wrap="square">
-            <a:spAutoFit/>
-          </a:bodyPr>
-          <a:lstStyle/>
-          <a:p>
-            <a:pPr>
-              <a:lnSpc>
-                <a:spcPct val="150000"/>
-              </a:lnSpc>
-            </a:pPr>
-            <a:r>
-              <a:rPr lang="en-US" sz="1600" b="1" i="0" u="none" strike="noStrike" cap="none" dirty="0">
-                <a:solidFill>
-                  <a:schemeClr val="tx1"/>
-                </a:solidFill>
-                <a:latin typeface="+mn-lt"/>
-                <a:ea typeface="DM Sans"/>
-                <a:cs typeface="DM Sans"/>
-                <a:sym typeface="DM Sans"/>
-              </a:rPr>
-              <a:t>Used for clinical treatment planning</a:t>
-            </a:r>
-            <a:endParaRPr lang="en-US" sz="1600" b="1" dirty="0"/>
-          </a:p>
-        </p:txBody>
-      </p:sp>
-      <p:sp>
-        <p:nvSpPr>
-          <p:cNvPr id="17" name="TextBox 16">
-            <a:extLst>
-              <a:ext uri="{FF2B5EF4-FFF2-40B4-BE49-F238E27FC236}">
-                <a16:creationId xmlns:a16="http://schemas.microsoft.com/office/drawing/2014/main" id="{824D03D3-290D-0047-5E2E-C0FF1F23EA77}"/>
-              </a:ext>
-            </a:extLst>
-          </p:cNvPr>
-          <p:cNvSpPr txBox="1"/>
-          <p:nvPr/>
-        </p:nvSpPr>
-        <p:spPr>
-          <a:xfrm>
-            <a:off x="4444442" y="5423446"/>
-            <a:ext cx="2849494" cy="698717"/>
-          </a:xfrm>
-          <a:prstGeom prst="rect">
-            <a:avLst/>
-          </a:prstGeom>
-          <a:noFill/>
-        </p:spPr>
-        <p:txBody>
-          <a:bodyPr wrap="square">
-            <a:spAutoFit/>
-          </a:bodyPr>
-          <a:lstStyle/>
-          <a:p>
-            <a:pPr>
-              <a:lnSpc>
-                <a:spcPct val="150000"/>
-              </a:lnSpc>
-            </a:pPr>
-            <a:r>
-              <a:rPr lang="en-US" sz="1400" b="1" i="0" u="none" strike="noStrike" cap="none" dirty="0">
-                <a:solidFill>
-                  <a:schemeClr val="tx1"/>
-                </a:solidFill>
-                <a:latin typeface="+mn-lt"/>
-                <a:ea typeface="DM Sans"/>
-                <a:cs typeface="DM Sans"/>
-                <a:sym typeface="DM Sans"/>
-              </a:rPr>
-              <a:t>Used for population-level comparison and Epidemiology</a:t>
-            </a:r>
-            <a:endParaRPr lang="en-US" b="1" dirty="0">
-              <a:solidFill>
-                <a:schemeClr val="tx1"/>
-              </a:solidFill>
-            </a:endParaRPr>
-          </a:p>
-        </p:txBody>
-      </p:sp>
-      <p:sp>
-        <p:nvSpPr>
-          <p:cNvPr id="18" name="Google Shape;264;p24">
-            <a:extLst>
-              <a:ext uri="{FF2B5EF4-FFF2-40B4-BE49-F238E27FC236}">
-                <a16:creationId xmlns:a16="http://schemas.microsoft.com/office/drawing/2014/main" id="{093057CE-1423-1B96-7879-5171B811FBB3}"/>
-              </a:ext>
-            </a:extLst>
-          </p:cNvPr>
-          <p:cNvSpPr txBox="1"/>
-          <p:nvPr/>
-        </p:nvSpPr>
-        <p:spPr>
-          <a:xfrm>
-            <a:off x="4902095" y="3321355"/>
-            <a:ext cx="1691456" cy="1477328"/>
-          </a:xfrm>
-          <a:prstGeom prst="rect">
-            <a:avLst/>
-          </a:prstGeom>
-          <a:noFill/>
-          <a:ln>
-            <a:noFill/>
-          </a:ln>
-        </p:spPr>
-        <p:txBody>
-          <a:bodyPr spcFirstLastPara="1" wrap="square" lIns="0" tIns="0" rIns="0" bIns="0" anchor="t" anchorCtr="0">
-            <a:spAutoFit/>
-          </a:bodyPr>
-          <a:lstStyle/>
-          <a:p>
-            <a:pPr marL="285750" marR="0" lvl="0" indent="-285750" rtl="0">
-              <a:lnSpc>
-                <a:spcPct val="200000"/>
-              </a:lnSpc>
-              <a:spcBef>
-                <a:spcPts val="0"/>
-              </a:spcBef>
-              <a:spcAft>
-                <a:spcPts val="0"/>
-              </a:spcAft>
-              <a:buFont typeface="Wingdings" pitchFamily="2" charset="2"/>
-              <a:buChar char="§"/>
-            </a:pPr>
-            <a:r>
-              <a:rPr lang="en-US" sz="1600" b="0" i="0" u="none" strike="noStrike" cap="none" dirty="0">
-                <a:solidFill>
-                  <a:schemeClr val="tx1"/>
-                </a:solidFill>
-                <a:latin typeface="+mn-lt"/>
-                <a:ea typeface="DM Sans"/>
-                <a:cs typeface="DM Sans"/>
-                <a:sym typeface="DM Sans"/>
-              </a:rPr>
-              <a:t>Localized</a:t>
-            </a:r>
-            <a:endParaRPr lang="en-US" sz="1600" dirty="0">
-              <a:solidFill>
-                <a:schemeClr val="tx1"/>
-              </a:solidFill>
-              <a:latin typeface="+mn-lt"/>
-              <a:ea typeface="DM Sans"/>
-              <a:cs typeface="DM Sans"/>
-              <a:sym typeface="DM Sans"/>
-            </a:endParaRPr>
-          </a:p>
-          <a:p>
-            <a:pPr marL="285750" marR="0" lvl="0" indent="-285750" rtl="0">
-              <a:lnSpc>
-                <a:spcPct val="200000"/>
-              </a:lnSpc>
-              <a:spcBef>
-                <a:spcPts val="0"/>
-              </a:spcBef>
-              <a:spcAft>
-                <a:spcPts val="0"/>
-              </a:spcAft>
-              <a:buFont typeface="Wingdings" pitchFamily="2" charset="2"/>
-              <a:buChar char="§"/>
-            </a:pPr>
-            <a:r>
-              <a:rPr lang="en-US" sz="1600" b="0" i="0" u="none" strike="noStrike" cap="none" dirty="0">
-                <a:solidFill>
-                  <a:schemeClr val="tx1"/>
-                </a:solidFill>
-                <a:latin typeface="+mn-lt"/>
-                <a:ea typeface="DM Sans"/>
-                <a:cs typeface="DM Sans"/>
-                <a:sym typeface="DM Sans"/>
-              </a:rPr>
-              <a:t>Regional</a:t>
-            </a:r>
-          </a:p>
-          <a:p>
-            <a:pPr marL="285750" marR="0" lvl="0" indent="-285750" rtl="0">
-              <a:lnSpc>
-                <a:spcPct val="200000"/>
-              </a:lnSpc>
-              <a:spcBef>
-                <a:spcPts val="0"/>
-              </a:spcBef>
-              <a:spcAft>
-                <a:spcPts val="0"/>
-              </a:spcAft>
-              <a:buFont typeface="Wingdings" pitchFamily="2" charset="2"/>
-              <a:buChar char="§"/>
-            </a:pPr>
-            <a:r>
-              <a:rPr lang="en-US" sz="1600" b="0" i="0" u="none" strike="noStrike" cap="none" dirty="0">
-                <a:solidFill>
-                  <a:schemeClr val="tx1"/>
-                </a:solidFill>
-                <a:latin typeface="+mn-lt"/>
-                <a:ea typeface="DM Sans"/>
-                <a:cs typeface="DM Sans"/>
-                <a:sym typeface="DM Sans"/>
-              </a:rPr>
-              <a:t>Distant. </a:t>
-            </a:r>
-            <a:endParaRPr sz="1600" dirty="0">
-              <a:solidFill>
-                <a:schemeClr val="tx1"/>
-              </a:solidFill>
-              <a:latin typeface="+mn-lt"/>
-            </a:endParaRPr>
-          </a:p>
-        </p:txBody>
-      </p:sp>
-      <p:sp>
-        <p:nvSpPr>
-          <p:cNvPr id="19" name="Right Arrow 18">
-            <a:extLst>
-              <a:ext uri="{FF2B5EF4-FFF2-40B4-BE49-F238E27FC236}">
-                <a16:creationId xmlns:a16="http://schemas.microsoft.com/office/drawing/2014/main" id="{5204407D-524F-9EB4-40D9-12E92B1E8BCA}"/>
-              </a:ext>
-            </a:extLst>
-          </p:cNvPr>
-          <p:cNvSpPr/>
-          <p:nvPr/>
-        </p:nvSpPr>
-        <p:spPr>
-          <a:xfrm rot="5400000">
-            <a:off x="1869364" y="4961194"/>
-            <a:ext cx="529705" cy="360375"/>
-          </a:xfrm>
-          <a:prstGeom prst="rightArrow">
-            <a:avLst/>
-          </a:prstGeom>
-          <a:solidFill>
-            <a:schemeClr val="tx1"/>
-          </a:solidFill>
-          <a:ln>
-            <a:solidFill>
-              <a:schemeClr val="tx1"/>
-            </a:solidFill>
-          </a:ln>
-        </p:spPr>
-        <p:style>
-          <a:lnRef idx="2">
-            <a:schemeClr val="accent1">
-              <a:shade val="15000"/>
-            </a:schemeClr>
-          </a:lnRef>
-          <a:fillRef idx="1">
-            <a:schemeClr val="accent1"/>
-          </a:fillRef>
-          <a:effectRef idx="0">
-            <a:schemeClr val="accent1"/>
-          </a:effectRef>
-          <a:fontRef idx="minor">
-            <a:schemeClr val="lt1"/>
-          </a:fontRef>
-        </p:style>
-        <p:txBody>
-          <a:bodyPr rtlCol="0" anchor="ctr"/>
-          <a:lstStyle/>
-          <a:p>
-            <a:pPr algn="ctr"/>
-            <a:endParaRPr lang="en-US">
-              <a:solidFill>
-                <a:srgbClr val="757575"/>
-              </a:solidFill>
-            </a:endParaRPr>
-          </a:p>
-        </p:txBody>
-      </p:sp>
-      <p:sp>
-        <p:nvSpPr>
-          <p:cNvPr id="20" name="Right Arrow 19">
-            <a:extLst>
-              <a:ext uri="{FF2B5EF4-FFF2-40B4-BE49-F238E27FC236}">
-                <a16:creationId xmlns:a16="http://schemas.microsoft.com/office/drawing/2014/main" id="{A5B51BA6-D0A2-5E77-84CA-297B5E6A587F}"/>
-              </a:ext>
-            </a:extLst>
-          </p:cNvPr>
-          <p:cNvSpPr/>
-          <p:nvPr/>
-        </p:nvSpPr>
-        <p:spPr>
-          <a:xfrm rot="5400000">
-            <a:off x="5341820" y="4961193"/>
-            <a:ext cx="529705" cy="360375"/>
-          </a:xfrm>
-          <a:prstGeom prst="rightArrow">
-            <a:avLst/>
-          </a:prstGeom>
-          <a:solidFill>
-            <a:schemeClr val="tx1"/>
-          </a:solidFill>
-          <a:ln>
-            <a:solidFill>
-              <a:schemeClr val="tx1"/>
-            </a:solidFill>
-          </a:ln>
-        </p:spPr>
-        <p:style>
-          <a:lnRef idx="2">
-            <a:schemeClr val="accent1">
-              <a:shade val="15000"/>
-            </a:schemeClr>
-          </a:lnRef>
-          <a:fillRef idx="1">
-            <a:schemeClr val="accent1"/>
-          </a:fillRef>
-          <a:effectRef idx="0">
-            <a:schemeClr val="accent1"/>
-          </a:effectRef>
-          <a:fontRef idx="minor">
-            <a:schemeClr val="lt1"/>
-          </a:fontRef>
-        </p:style>
-        <p:txBody>
-          <a:bodyPr rtlCol="0" anchor="ctr"/>
-          <a:lstStyle/>
-          <a:p>
-            <a:pPr algn="ctr"/>
-            <a:endParaRPr lang="en-US">
-              <a:solidFill>
-                <a:srgbClr val="757575"/>
-              </a:solidFill>
-            </a:endParaRPr>
-          </a:p>
-        </p:txBody>
-      </p:sp>
+            <a:ln w="38100">
+              <a:noFill/>
+            </a:ln>
+          </p:spPr>
+          <p:txBody>
+            <a:bodyPr wrap="none">
+              <a:spAutoFit/>
+            </a:bodyPr>
+            <a:lstStyle/>
+            <a:p>
+              <a:r>
+                <a:rPr sz="1600" b="1" dirty="0"/>
+                <a:t>QC</a:t>
+              </a:r>
+            </a:p>
+          </p:txBody>
+        </p:sp>
+      </p:grpSp>
     </p:spTree>
   </p:cSld>
   <p:clrMapOvr>
@@ -14015,212 +13363,6 @@
 </file>
 
 <file path=ppt/slides/slide11.xml><?xml version="1.0" encoding="utf-8"?>
-<p:sld xmlns:a="http://schemas.openxmlformats.org/drawingml/2006/main" xmlns:r="http://schemas.openxmlformats.org/officeDocument/2006/relationships" xmlns:p="http://schemas.openxmlformats.org/presentationml/2006/main">
-  <p:cSld>
-    <p:bg>
-      <p:bgPr>
-        <a:solidFill>
-          <a:srgbClr val="FFFFFF"/>
-        </a:solidFill>
-        <a:effectLst/>
-      </p:bgPr>
-    </p:bg>
-    <p:spTree>
-      <p:nvGrpSpPr>
-        <p:cNvPr id="1" name="Shape 275"/>
-        <p:cNvGrpSpPr/>
-        <p:nvPr/>
-      </p:nvGrpSpPr>
-      <p:grpSpPr>
-        <a:xfrm>
-          <a:off x="0" y="0"/>
-          <a:ext cx="0" cy="0"/>
-          <a:chOff x="0" y="0"/>
-          <a:chExt cx="0" cy="0"/>
-        </a:xfrm>
-      </p:grpSpPr>
-      <p:pic>
-        <p:nvPicPr>
-          <p:cNvPr id="276" name="Google Shape;276;p25" descr="image.png"/>
-          <p:cNvPicPr preferRelativeResize="0"/>
-          <p:nvPr/>
-        </p:nvPicPr>
-        <p:blipFill rotWithShape="1">
-          <a:blip r:embed="rId3">
-            <a:alphaModFix/>
-          </a:blip>
-          <a:srcRect/>
-          <a:stretch/>
-        </p:blipFill>
-        <p:spPr>
-          <a:xfrm>
-            <a:off x="0" y="0"/>
-            <a:ext cx="12192000" cy="6858000"/>
-          </a:xfrm>
-          <a:prstGeom prst="rect">
-            <a:avLst/>
-          </a:prstGeom>
-          <a:noFill/>
-          <a:ln>
-            <a:noFill/>
-          </a:ln>
-        </p:spPr>
-      </p:pic>
-      <p:sp>
-        <p:nvSpPr>
-          <p:cNvPr id="277" name="Google Shape;277;p25"/>
-          <p:cNvSpPr txBox="1"/>
-          <p:nvPr/>
-        </p:nvSpPr>
-        <p:spPr>
-          <a:xfrm>
-            <a:off x="342900" y="91585"/>
-            <a:ext cx="4800600" cy="553998"/>
-          </a:xfrm>
-          <a:prstGeom prst="rect">
-            <a:avLst/>
-          </a:prstGeom>
-          <a:noFill/>
-          <a:ln>
-            <a:noFill/>
-          </a:ln>
-        </p:spPr>
-        <p:txBody>
-          <a:bodyPr spcFirstLastPara="1" wrap="square" lIns="0" tIns="0" rIns="0" bIns="0" anchor="t" anchorCtr="0">
-            <a:spAutoFit/>
-          </a:bodyPr>
-          <a:lstStyle/>
-          <a:p>
-            <a:pPr marL="0" marR="0" lvl="0" indent="0" algn="l" rtl="0">
-              <a:spcBef>
-                <a:spcPts val="0"/>
-              </a:spcBef>
-              <a:spcAft>
-                <a:spcPts val="0"/>
-              </a:spcAft>
-              <a:buNone/>
-            </a:pPr>
-            <a:r>
-              <a:rPr lang="en-US" sz="3600" b="1" i="0" u="none" strike="noStrike" cap="none" dirty="0">
-                <a:solidFill>
-                  <a:schemeClr val="bg2">
-                    <a:lumMod val="60000"/>
-                    <a:lumOff val="40000"/>
-                  </a:schemeClr>
-                </a:solidFill>
-                <a:latin typeface="+mn-lt"/>
-                <a:ea typeface="Merriweather"/>
-                <a:cs typeface="Merriweather"/>
-                <a:sym typeface="Merriweather"/>
-              </a:rPr>
-              <a:t>The Data Ecosystem</a:t>
-            </a:r>
-            <a:endParaRPr dirty="0">
-              <a:solidFill>
-                <a:schemeClr val="bg2">
-                  <a:lumMod val="60000"/>
-                  <a:lumOff val="40000"/>
-                </a:schemeClr>
-              </a:solidFill>
-              <a:latin typeface="+mn-lt"/>
-            </a:endParaRPr>
-          </a:p>
-        </p:txBody>
-      </p:sp>
-      <p:sp>
-        <p:nvSpPr>
-          <p:cNvPr id="280" name="Google Shape;280;p25"/>
-          <p:cNvSpPr txBox="1"/>
-          <p:nvPr/>
-        </p:nvSpPr>
-        <p:spPr>
-          <a:xfrm>
-            <a:off x="2617470" y="1291165"/>
-            <a:ext cx="7372350" cy="492443"/>
-          </a:xfrm>
-          <a:prstGeom prst="rect">
-            <a:avLst/>
-          </a:prstGeom>
-          <a:noFill/>
-          <a:ln>
-            <a:noFill/>
-          </a:ln>
-        </p:spPr>
-        <p:txBody>
-          <a:bodyPr spcFirstLastPara="1" wrap="square" lIns="0" tIns="0" rIns="0" bIns="0" anchor="t" anchorCtr="0">
-            <a:spAutoFit/>
-          </a:bodyPr>
-          <a:lstStyle/>
-          <a:p>
-            <a:pPr marL="0" marR="0" lvl="0" indent="0" algn="l" rtl="0">
-              <a:lnSpc>
-                <a:spcPct val="160000"/>
-              </a:lnSpc>
-              <a:spcBef>
-                <a:spcPts val="0"/>
-              </a:spcBef>
-              <a:spcAft>
-                <a:spcPts val="0"/>
-              </a:spcAft>
-              <a:buNone/>
-            </a:pPr>
-            <a:r>
-              <a:rPr lang="en-US" sz="2000" b="1" i="0" u="none" strike="noStrike" cap="none" dirty="0">
-                <a:solidFill>
-                  <a:srgbClr val="374151"/>
-                </a:solidFill>
-                <a:latin typeface="+mn-lt"/>
-                <a:ea typeface="DM Sans"/>
-                <a:cs typeface="DM Sans"/>
-                <a:sym typeface="DM Sans"/>
-              </a:rPr>
-              <a:t>Cancer data is an aggregation of multiple streams:</a:t>
-            </a:r>
-            <a:endParaRPr sz="2000" b="1" dirty="0">
-              <a:latin typeface="+mn-lt"/>
-            </a:endParaRPr>
-          </a:p>
-        </p:txBody>
-      </p:sp>
-      <p:pic>
-        <p:nvPicPr>
-          <p:cNvPr id="4" name="Picture 3">
-            <a:extLst>
-              <a:ext uri="{FF2B5EF4-FFF2-40B4-BE49-F238E27FC236}">
-                <a16:creationId xmlns:a16="http://schemas.microsoft.com/office/drawing/2014/main" id="{346DBA2C-84F2-762E-FE52-033123D39996}"/>
-              </a:ext>
-            </a:extLst>
-          </p:cNvPr>
-          <p:cNvPicPr>
-            <a:picLocks noChangeAspect="1"/>
-          </p:cNvPicPr>
-          <p:nvPr/>
-        </p:nvPicPr>
-        <p:blipFill>
-          <a:blip r:embed="rId4"/>
-          <a:stretch>
-            <a:fillRect/>
-          </a:stretch>
-        </p:blipFill>
-        <p:spPr>
-          <a:xfrm>
-            <a:off x="1212731" y="1936748"/>
-            <a:ext cx="9766537" cy="4443966"/>
-          </a:xfrm>
-          <a:prstGeom prst="rect">
-            <a:avLst/>
-          </a:prstGeom>
-        </p:spPr>
-      </p:pic>
-    </p:spTree>
-  </p:cSld>
-  <p:clrMapOvr>
-    <a:masterClrMapping/>
-  </p:clrMapOvr>
-</p:sld>
-</file>
-
-<file path=ppt/slides/slide12.xml><?xml version="1.0" encoding="utf-8"?>
 <p:sld xmlns:a="http://schemas.openxmlformats.org/drawingml/2006/main" xmlns:r="http://schemas.openxmlformats.org/officeDocument/2006/relationships" xmlns:p="http://schemas.openxmlformats.org/presentationml/2006/main">
   <p:cSld>
     <p:bg>
@@ -14771,224 +13913,7 @@
 </p:sld>
 </file>
 
-<file path=ppt/slides/slide13.xml><?xml version="1.0" encoding="utf-8"?>
-<p:sld xmlns:a="http://schemas.openxmlformats.org/drawingml/2006/main" xmlns:r="http://schemas.openxmlformats.org/officeDocument/2006/relationships" xmlns:p="http://schemas.openxmlformats.org/presentationml/2006/main">
-  <p:cSld>
-    <p:bg>
-      <p:bgPr>
-        <a:solidFill>
-          <a:srgbClr val="FFFFFF"/>
-        </a:solidFill>
-        <a:effectLst/>
-      </p:bgPr>
-    </p:bg>
-    <p:spTree>
-      <p:nvGrpSpPr>
-        <p:cNvPr id="1" name="Shape 309"/>
-        <p:cNvGrpSpPr/>
-        <p:nvPr/>
-      </p:nvGrpSpPr>
-      <p:grpSpPr>
-        <a:xfrm>
-          <a:off x="0" y="0"/>
-          <a:ext cx="0" cy="0"/>
-          <a:chOff x="0" y="0"/>
-          <a:chExt cx="0" cy="0"/>
-        </a:xfrm>
-      </p:grpSpPr>
-      <p:pic>
-        <p:nvPicPr>
-          <p:cNvPr id="310" name="Google Shape;310;p27" descr="image.png"/>
-          <p:cNvPicPr preferRelativeResize="0"/>
-          <p:nvPr/>
-        </p:nvPicPr>
-        <p:blipFill rotWithShape="1">
-          <a:blip r:embed="rId3">
-            <a:alphaModFix/>
-          </a:blip>
-          <a:srcRect/>
-          <a:stretch/>
-        </p:blipFill>
-        <p:spPr>
-          <a:xfrm>
-            <a:off x="0" y="256856"/>
-            <a:ext cx="12192000" cy="6858000"/>
-          </a:xfrm>
-          <a:prstGeom prst="rect">
-            <a:avLst/>
-          </a:prstGeom>
-          <a:noFill/>
-          <a:ln>
-            <a:noFill/>
-          </a:ln>
-        </p:spPr>
-      </p:pic>
-      <p:pic>
-        <p:nvPicPr>
-          <p:cNvPr id="311" name="Google Shape;311;p27" descr="image.png"/>
-          <p:cNvPicPr preferRelativeResize="0"/>
-          <p:nvPr/>
-        </p:nvPicPr>
-        <p:blipFill rotWithShape="1">
-          <a:blip r:embed="rId4">
-            <a:alphaModFix/>
-          </a:blip>
-          <a:srcRect l="5955" t="12416" b="26423"/>
-          <a:stretch>
-            <a:fillRect/>
-          </a:stretch>
-        </p:blipFill>
-        <p:spPr>
-          <a:xfrm>
-            <a:off x="312718" y="1426485"/>
-            <a:ext cx="10937025" cy="3702727"/>
-          </a:xfrm>
-          <a:prstGeom prst="rect">
-            <a:avLst/>
-          </a:prstGeom>
-          <a:noFill/>
-          <a:ln>
-            <a:noFill/>
-          </a:ln>
-        </p:spPr>
-      </p:pic>
-      <p:sp>
-        <p:nvSpPr>
-          <p:cNvPr id="312" name="Google Shape;312;p27"/>
-          <p:cNvSpPr txBox="1"/>
-          <p:nvPr/>
-        </p:nvSpPr>
-        <p:spPr>
-          <a:xfrm>
-            <a:off x="3175591" y="5270531"/>
-            <a:ext cx="6754222" cy="492443"/>
-          </a:xfrm>
-          <a:prstGeom prst="rect">
-            <a:avLst/>
-          </a:prstGeom>
-          <a:noFill/>
-          <a:ln>
-            <a:noFill/>
-          </a:ln>
-        </p:spPr>
-        <p:txBody>
-          <a:bodyPr spcFirstLastPara="1" wrap="square" lIns="0" tIns="0" rIns="0" bIns="0" anchor="t" anchorCtr="0">
-            <a:spAutoFit/>
-          </a:bodyPr>
-          <a:lstStyle/>
-          <a:p>
-            <a:pPr marL="0" marR="0" lvl="0" indent="0" algn="ctr" rtl="0">
-              <a:lnSpc>
-                <a:spcPct val="160000"/>
-              </a:lnSpc>
-              <a:spcBef>
-                <a:spcPts val="0"/>
-              </a:spcBef>
-              <a:spcAft>
-                <a:spcPts val="0"/>
-              </a:spcAft>
-              <a:buNone/>
-            </a:pPr>
-            <a:r>
-              <a:rPr lang="en-US" sz="2000" b="1" i="0" u="none" strike="noStrike" cap="none" dirty="0">
-                <a:solidFill>
-                  <a:srgbClr val="374151"/>
-                </a:solidFill>
-                <a:latin typeface="+mn-lt"/>
-                <a:ea typeface="DM Sans"/>
-                <a:cs typeface="DM Sans"/>
-                <a:sym typeface="DM Sans"/>
-              </a:rPr>
-              <a:t>Meeting these standards ensures data is “Fit for Use</a:t>
-            </a:r>
-            <a:r>
-              <a:rPr lang="en-US" sz="2000" b="1" dirty="0">
-                <a:solidFill>
-                  <a:srgbClr val="374151"/>
-                </a:solidFill>
-                <a:latin typeface="+mn-lt"/>
-                <a:ea typeface="DM Sans"/>
-                <a:cs typeface="DM Sans"/>
-                <a:sym typeface="DM Sans"/>
-              </a:rPr>
-              <a:t>”</a:t>
-            </a:r>
-            <a:endParaRPr sz="2000" b="1" dirty="0">
-              <a:latin typeface="+mn-lt"/>
-            </a:endParaRPr>
-          </a:p>
-        </p:txBody>
-      </p:sp>
-      <p:sp>
-        <p:nvSpPr>
-          <p:cNvPr id="313" name="Google Shape;313;p27"/>
-          <p:cNvSpPr txBox="1"/>
-          <p:nvPr/>
-        </p:nvSpPr>
-        <p:spPr>
-          <a:xfrm>
-            <a:off x="485775" y="256856"/>
-            <a:ext cx="6541681" cy="553998"/>
-          </a:xfrm>
-          <a:prstGeom prst="rect">
-            <a:avLst/>
-          </a:prstGeom>
-          <a:noFill/>
-          <a:ln>
-            <a:noFill/>
-          </a:ln>
-        </p:spPr>
-        <p:txBody>
-          <a:bodyPr spcFirstLastPara="1" wrap="square" lIns="0" tIns="0" rIns="0" bIns="0" anchor="t" anchorCtr="0">
-            <a:spAutoFit/>
-          </a:bodyPr>
-          <a:lstStyle/>
-          <a:p>
-            <a:pPr marL="0" marR="0" lvl="0" indent="0" algn="l" rtl="0">
-              <a:spcBef>
-                <a:spcPts val="0"/>
-              </a:spcBef>
-              <a:spcAft>
-                <a:spcPts val="0"/>
-              </a:spcAft>
-              <a:buNone/>
-            </a:pPr>
-            <a:r>
-              <a:rPr lang="en-US" sz="3600" b="1" i="0" u="none" strike="noStrike" cap="none" dirty="0">
-                <a:solidFill>
-                  <a:schemeClr val="bg2">
-                    <a:lumMod val="60000"/>
-                    <a:lumOff val="40000"/>
-                  </a:schemeClr>
-                </a:solidFill>
-                <a:latin typeface="+mn-lt"/>
-                <a:ea typeface="Merriweather"/>
-                <a:cs typeface="Merriweather"/>
-                <a:sym typeface="Merriweather"/>
-              </a:rPr>
-              <a:t>NPCR Data Quality Targets</a:t>
-            </a:r>
-            <a:endParaRPr dirty="0">
-              <a:solidFill>
-                <a:schemeClr val="bg2">
-                  <a:lumMod val="60000"/>
-                  <a:lumOff val="40000"/>
-                </a:schemeClr>
-              </a:solidFill>
-              <a:latin typeface="+mn-lt"/>
-            </a:endParaRPr>
-          </a:p>
-        </p:txBody>
-      </p:sp>
-    </p:spTree>
-  </p:cSld>
-  <p:clrMapOvr>
-    <a:masterClrMapping/>
-  </p:clrMapOvr>
-</p:sld>
-</file>
-
-<file path=ppt/slides/slide14.xml><?xml version="1.0" encoding="utf-8"?>
+<file path=ppt/slides/slide12.xml><?xml version="1.0" encoding="utf-8"?>
 <p:sld xmlns:a="http://schemas.openxmlformats.org/drawingml/2006/main" xmlns:r="http://schemas.openxmlformats.org/officeDocument/2006/relationships" xmlns:p="http://schemas.openxmlformats.org/presentationml/2006/main">
   <p:cSld>
     <p:bg>
@@ -15251,7 +14176,7 @@
         </p:nvSpPr>
         <p:spPr>
           <a:xfrm>
-            <a:off x="400050" y="248026"/>
+            <a:off x="411480" y="367309"/>
             <a:ext cx="6084481" cy="553998"/>
           </a:xfrm>
           <a:prstGeom prst="rect">
@@ -15441,7 +14366,7 @@
 </p:sld>
 </file>
 
-<file path=ppt/slides/slide15.xml><?xml version="1.0" encoding="utf-8"?>
+<file path=ppt/slides/slide13.xml><?xml version="1.0" encoding="utf-8"?>
 <p:sld xmlns:a="http://schemas.openxmlformats.org/drawingml/2006/main" xmlns:r="http://schemas.openxmlformats.org/officeDocument/2006/relationships" xmlns:p="http://schemas.openxmlformats.org/presentationml/2006/main">
   <p:cSld>
     <p:bg>
@@ -16109,514 +15034,7 @@
 </p:sld>
 </file>
 
-<file path=ppt/slides/slide16.xml><?xml version="1.0" encoding="utf-8"?>
-<p:sld xmlns:a="http://schemas.openxmlformats.org/drawingml/2006/main" xmlns:r="http://schemas.openxmlformats.org/officeDocument/2006/relationships" xmlns:p="http://schemas.openxmlformats.org/presentationml/2006/main">
-  <p:cSld>
-    <p:bg>
-      <p:bgPr>
-        <a:solidFill>
-          <a:srgbClr val="FFFFFF"/>
-        </a:solidFill>
-        <a:effectLst/>
-      </p:bgPr>
-    </p:bg>
-    <p:spTree>
-      <p:nvGrpSpPr>
-        <p:cNvPr id="1" name="Shape 366"/>
-        <p:cNvGrpSpPr/>
-        <p:nvPr/>
-      </p:nvGrpSpPr>
-      <p:grpSpPr>
-        <a:xfrm>
-          <a:off x="0" y="0"/>
-          <a:ext cx="0" cy="0"/>
-          <a:chOff x="0" y="0"/>
-          <a:chExt cx="0" cy="0"/>
-        </a:xfrm>
-      </p:grpSpPr>
-      <p:pic>
-        <p:nvPicPr>
-          <p:cNvPr id="367" name="Google Shape;367;p31" descr="image.png"/>
-          <p:cNvPicPr preferRelativeResize="0"/>
-          <p:nvPr/>
-        </p:nvPicPr>
-        <p:blipFill rotWithShape="1">
-          <a:blip r:embed="rId3">
-            <a:alphaModFix/>
-          </a:blip>
-          <a:srcRect/>
-          <a:stretch/>
-        </p:blipFill>
-        <p:spPr>
-          <a:xfrm>
-            <a:off x="0" y="0"/>
-            <a:ext cx="12192000" cy="6858000"/>
-          </a:xfrm>
-          <a:prstGeom prst="rect">
-            <a:avLst/>
-          </a:prstGeom>
-          <a:noFill/>
-          <a:ln>
-            <a:noFill/>
-          </a:ln>
-        </p:spPr>
-      </p:pic>
-      <p:pic>
-        <p:nvPicPr>
-          <p:cNvPr id="368" name="Google Shape;368;p31" descr="image.png"/>
-          <p:cNvPicPr preferRelativeResize="0"/>
-          <p:nvPr/>
-        </p:nvPicPr>
-        <p:blipFill rotWithShape="1">
-          <a:blip r:embed="rId4">
-            <a:alphaModFix/>
-          </a:blip>
-          <a:srcRect/>
-          <a:stretch/>
-        </p:blipFill>
-        <p:spPr>
-          <a:xfrm>
-            <a:off x="1327775" y="1362221"/>
-            <a:ext cx="4025110" cy="4037864"/>
-          </a:xfrm>
-          <a:prstGeom prst="rect">
-            <a:avLst/>
-          </a:prstGeom>
-          <a:noFill/>
-          <a:ln>
-            <a:noFill/>
-          </a:ln>
-        </p:spPr>
-      </p:pic>
-      <p:pic>
-        <p:nvPicPr>
-          <p:cNvPr id="369" name="Google Shape;369;p31" descr="image.png"/>
-          <p:cNvPicPr preferRelativeResize="0"/>
-          <p:nvPr/>
-        </p:nvPicPr>
-        <p:blipFill rotWithShape="1">
-          <a:blip r:embed="rId5">
-            <a:alphaModFix/>
-          </a:blip>
-          <a:srcRect/>
-          <a:stretch/>
-        </p:blipFill>
-        <p:spPr>
-          <a:xfrm>
-            <a:off x="6290491" y="1457915"/>
-            <a:ext cx="4025111" cy="3942170"/>
-          </a:xfrm>
-          <a:prstGeom prst="rect">
-            <a:avLst/>
-          </a:prstGeom>
-          <a:noFill/>
-          <a:ln>
-            <a:noFill/>
-          </a:ln>
-        </p:spPr>
-      </p:pic>
-      <p:sp>
-        <p:nvSpPr>
-          <p:cNvPr id="370" name="Google Shape;370;p31"/>
-          <p:cNvSpPr txBox="1"/>
-          <p:nvPr/>
-        </p:nvSpPr>
-        <p:spPr>
-          <a:xfrm>
-            <a:off x="1327775" y="2888353"/>
-            <a:ext cx="2319264" cy="307777"/>
-          </a:xfrm>
-          <a:prstGeom prst="rect">
-            <a:avLst/>
-          </a:prstGeom>
-          <a:noFill/>
-          <a:ln>
-            <a:noFill/>
-          </a:ln>
-        </p:spPr>
-        <p:txBody>
-          <a:bodyPr spcFirstLastPara="1" wrap="square" lIns="0" tIns="0" rIns="0" bIns="0" anchor="t" anchorCtr="0">
-            <a:spAutoFit/>
-          </a:bodyPr>
-          <a:lstStyle/>
-          <a:p>
-            <a:pPr marL="0" marR="0" lvl="0" indent="0" algn="ctr" rtl="0">
-              <a:spcBef>
-                <a:spcPts val="0"/>
-              </a:spcBef>
-              <a:spcAft>
-                <a:spcPts val="0"/>
-              </a:spcAft>
-              <a:buNone/>
-            </a:pPr>
-            <a:r>
-              <a:rPr lang="en-US" sz="2000" b="1" i="0" u="none" strike="noStrike" cap="none" dirty="0">
-                <a:solidFill>
-                  <a:schemeClr val="tx1"/>
-                </a:solidFill>
-                <a:latin typeface="+mn-lt"/>
-                <a:ea typeface="Merriweather"/>
-                <a:cs typeface="Merriweather"/>
-                <a:sym typeface="Merriweather"/>
-              </a:rPr>
-              <a:t>Skeleton Notes</a:t>
-            </a:r>
-            <a:endParaRPr sz="2000" dirty="0">
-              <a:solidFill>
-                <a:schemeClr val="tx1"/>
-              </a:solidFill>
-              <a:latin typeface="+mn-lt"/>
-            </a:endParaRPr>
-          </a:p>
-        </p:txBody>
-      </p:sp>
-      <p:sp>
-        <p:nvSpPr>
-          <p:cNvPr id="371" name="Google Shape;371;p31"/>
-          <p:cNvSpPr txBox="1"/>
-          <p:nvPr/>
-        </p:nvSpPr>
-        <p:spPr>
-          <a:xfrm>
-            <a:off x="1623049" y="3404661"/>
-            <a:ext cx="3487223" cy="1846659"/>
-          </a:xfrm>
-          <a:prstGeom prst="rect">
-            <a:avLst/>
-          </a:prstGeom>
-          <a:noFill/>
-          <a:ln>
-            <a:noFill/>
-          </a:ln>
-        </p:spPr>
-        <p:txBody>
-          <a:bodyPr spcFirstLastPara="1" wrap="square" lIns="0" tIns="0" rIns="0" bIns="0" anchor="t" anchorCtr="0">
-            <a:spAutoFit/>
-          </a:bodyPr>
-          <a:lstStyle/>
-          <a:p>
-            <a:pPr marL="285750" marR="0" lvl="0" indent="-285750" rtl="0">
-              <a:lnSpc>
-                <a:spcPct val="150000"/>
-              </a:lnSpc>
-              <a:spcBef>
-                <a:spcPts val="0"/>
-              </a:spcBef>
-              <a:spcAft>
-                <a:spcPts val="0"/>
-              </a:spcAft>
-              <a:buFont typeface="Wingdings" pitchFamily="2" charset="2"/>
-              <a:buChar char="§"/>
-            </a:pPr>
-            <a:r>
-              <a:rPr lang="en-US" sz="1600" b="0" i="0" u="none" strike="noStrike" cap="none" dirty="0">
-                <a:solidFill>
-                  <a:schemeClr val="tx1"/>
-                </a:solidFill>
-                <a:latin typeface="+mn-lt"/>
-                <a:ea typeface="DM Sans"/>
-                <a:cs typeface="DM Sans"/>
-                <a:sym typeface="DM Sans"/>
-              </a:rPr>
-              <a:t>A fillable handout to help you follow along and capture key metrics during the session.</a:t>
-            </a:r>
-          </a:p>
-          <a:p>
-            <a:pPr marL="285750" marR="0" lvl="0" indent="-285750" rtl="0">
-              <a:lnSpc>
-                <a:spcPct val="150000"/>
-              </a:lnSpc>
-              <a:spcBef>
-                <a:spcPts val="0"/>
-              </a:spcBef>
-              <a:spcAft>
-                <a:spcPts val="0"/>
-              </a:spcAft>
-              <a:buFont typeface="Wingdings" pitchFamily="2" charset="2"/>
-              <a:buChar char="§"/>
-            </a:pPr>
-            <a:r>
-              <a:rPr lang="en-US" sz="1600" b="0" i="0" u="none" strike="noStrike" cap="none" dirty="0">
-                <a:solidFill>
-                  <a:schemeClr val="tx1"/>
-                </a:solidFill>
-                <a:latin typeface="+mn-lt"/>
-                <a:ea typeface="DM Sans"/>
-                <a:cs typeface="DM Sans"/>
-                <a:sym typeface="DM Sans"/>
-              </a:rPr>
-              <a:t>Check the chat for the download link.</a:t>
-            </a:r>
-            <a:endParaRPr sz="1600" dirty="0">
-              <a:solidFill>
-                <a:schemeClr val="tx1"/>
-              </a:solidFill>
-              <a:latin typeface="+mn-lt"/>
-            </a:endParaRPr>
-          </a:p>
-        </p:txBody>
-      </p:sp>
-      <p:sp>
-        <p:nvSpPr>
-          <p:cNvPr id="372" name="Google Shape;372;p31"/>
-          <p:cNvSpPr txBox="1"/>
-          <p:nvPr/>
-        </p:nvSpPr>
-        <p:spPr>
-          <a:xfrm>
-            <a:off x="6462207" y="2928887"/>
-            <a:ext cx="2411991" cy="307777"/>
-          </a:xfrm>
-          <a:prstGeom prst="rect">
-            <a:avLst/>
-          </a:prstGeom>
-          <a:noFill/>
-          <a:ln>
-            <a:noFill/>
-          </a:ln>
-        </p:spPr>
-        <p:txBody>
-          <a:bodyPr spcFirstLastPara="1" wrap="square" lIns="0" tIns="0" rIns="0" bIns="0" anchor="t" anchorCtr="0">
-            <a:spAutoFit/>
-          </a:bodyPr>
-          <a:lstStyle/>
-          <a:p>
-            <a:pPr marL="0" marR="0" lvl="0" indent="0" algn="ctr" rtl="0">
-              <a:spcBef>
-                <a:spcPts val="0"/>
-              </a:spcBef>
-              <a:spcAft>
-                <a:spcPts val="0"/>
-              </a:spcAft>
-              <a:buNone/>
-            </a:pPr>
-            <a:r>
-              <a:rPr lang="en-US" sz="2000" b="1" i="0" u="none" strike="noStrike" cap="none" dirty="0">
-                <a:solidFill>
-                  <a:schemeClr val="tx1"/>
-                </a:solidFill>
-                <a:latin typeface="+mn-lt"/>
-                <a:ea typeface="Merriweather"/>
-                <a:cs typeface="Merriweather"/>
-                <a:sym typeface="Merriweather"/>
-              </a:rPr>
-              <a:t>Case Study Guide</a:t>
-            </a:r>
-            <a:endParaRPr sz="2000" dirty="0">
-              <a:solidFill>
-                <a:schemeClr val="tx1"/>
-              </a:solidFill>
-              <a:latin typeface="+mn-lt"/>
-            </a:endParaRPr>
-          </a:p>
-        </p:txBody>
-      </p:sp>
-      <p:sp>
-        <p:nvSpPr>
-          <p:cNvPr id="373" name="Google Shape;373;p31"/>
-          <p:cNvSpPr txBox="1"/>
-          <p:nvPr/>
-        </p:nvSpPr>
-        <p:spPr>
-          <a:xfrm>
-            <a:off x="6556302" y="3404661"/>
-            <a:ext cx="3357696" cy="1181862"/>
-          </a:xfrm>
-          <a:prstGeom prst="rect">
-            <a:avLst/>
-          </a:prstGeom>
-          <a:noFill/>
-          <a:ln>
-            <a:noFill/>
-          </a:ln>
-        </p:spPr>
-        <p:txBody>
-          <a:bodyPr spcFirstLastPara="1" wrap="square" lIns="0" tIns="0" rIns="0" bIns="0" anchor="t" anchorCtr="0">
-            <a:spAutoFit/>
-          </a:bodyPr>
-          <a:lstStyle/>
-          <a:p>
-            <a:pPr marL="0" marR="0" lvl="0" indent="0" rtl="0">
-              <a:lnSpc>
-                <a:spcPct val="160000"/>
-              </a:lnSpc>
-              <a:spcBef>
-                <a:spcPts val="0"/>
-              </a:spcBef>
-              <a:spcAft>
-                <a:spcPts val="0"/>
-              </a:spcAft>
-              <a:buNone/>
-            </a:pPr>
-            <a:r>
-              <a:rPr lang="en-US" sz="1600" b="0" i="0" u="none" strike="noStrike" cap="none" dirty="0">
-                <a:solidFill>
-                  <a:schemeClr val="tx1"/>
-                </a:solidFill>
-                <a:latin typeface="+mn-lt"/>
-                <a:ea typeface="DM Sans"/>
-                <a:cs typeface="DM Sans"/>
-                <a:sym typeface="DM Sans"/>
-              </a:rPr>
-              <a:t>A reference sheet for the "</a:t>
-            </a:r>
-            <a:r>
-              <a:rPr lang="en-US" sz="1600" b="1" i="0" u="none" strike="noStrike" cap="none" dirty="0">
-                <a:solidFill>
-                  <a:schemeClr val="tx1"/>
-                </a:solidFill>
-                <a:latin typeface="+mn-lt"/>
-                <a:ea typeface="DM Sans"/>
-                <a:cs typeface="DM Sans"/>
-                <a:sym typeface="DM Sans"/>
-              </a:rPr>
-              <a:t>Rural Spike</a:t>
-            </a:r>
-            <a:r>
-              <a:rPr lang="en-US" sz="1600" b="0" i="0" u="none" strike="noStrike" cap="none" dirty="0">
-                <a:solidFill>
-                  <a:schemeClr val="tx1"/>
-                </a:solidFill>
-                <a:latin typeface="+mn-lt"/>
-                <a:ea typeface="DM Sans"/>
-                <a:cs typeface="DM Sans"/>
-                <a:sym typeface="DM Sans"/>
-              </a:rPr>
-              <a:t>" breakout activity, including the rubric for your group's diagnosis.</a:t>
-            </a:r>
-            <a:endParaRPr sz="1600" dirty="0">
-              <a:solidFill>
-                <a:schemeClr val="tx1"/>
-              </a:solidFill>
-              <a:latin typeface="+mn-lt"/>
-            </a:endParaRPr>
-          </a:p>
-        </p:txBody>
-      </p:sp>
-      <p:pic>
-        <p:nvPicPr>
-          <p:cNvPr id="374" name="Google Shape;374;p31" descr="image.png"/>
-          <p:cNvPicPr preferRelativeResize="0"/>
-          <p:nvPr/>
-        </p:nvPicPr>
-        <p:blipFill rotWithShape="1">
-          <a:blip r:embed="rId6">
-            <a:alphaModFix/>
-          </a:blip>
-          <a:srcRect/>
-          <a:stretch/>
-        </p:blipFill>
-        <p:spPr>
-          <a:xfrm>
-            <a:off x="2789146" y="1615338"/>
-            <a:ext cx="1153167" cy="1097160"/>
-          </a:xfrm>
-          <a:prstGeom prst="rect">
-            <a:avLst/>
-          </a:prstGeom>
-          <a:noFill/>
-          <a:ln>
-            <a:noFill/>
-          </a:ln>
-        </p:spPr>
-      </p:pic>
-      <p:pic>
-        <p:nvPicPr>
-          <p:cNvPr id="375" name="Google Shape;375;p31" descr="image.png"/>
-          <p:cNvPicPr preferRelativeResize="0"/>
-          <p:nvPr/>
-        </p:nvPicPr>
-        <p:blipFill rotWithShape="1">
-          <a:blip r:embed="rId7">
-            <a:alphaModFix/>
-          </a:blip>
-          <a:srcRect/>
-          <a:stretch/>
-        </p:blipFill>
-        <p:spPr>
-          <a:xfrm>
-            <a:off x="7817916" y="1652789"/>
-            <a:ext cx="1414944" cy="1019175"/>
-          </a:xfrm>
-          <a:prstGeom prst="rect">
-            <a:avLst/>
-          </a:prstGeom>
-          <a:noFill/>
-          <a:ln>
-            <a:noFill/>
-          </a:ln>
-        </p:spPr>
-      </p:pic>
-      <p:sp>
-        <p:nvSpPr>
-          <p:cNvPr id="376" name="Google Shape;376;p31"/>
-          <p:cNvSpPr txBox="1"/>
-          <p:nvPr/>
-        </p:nvSpPr>
-        <p:spPr>
-          <a:xfrm>
-            <a:off x="400050" y="164401"/>
-            <a:ext cx="11601450" cy="553998"/>
-          </a:xfrm>
-          <a:prstGeom prst="rect">
-            <a:avLst/>
-          </a:prstGeom>
-          <a:noFill/>
-          <a:ln>
-            <a:noFill/>
-          </a:ln>
-        </p:spPr>
-        <p:txBody>
-          <a:bodyPr spcFirstLastPara="1" wrap="square" lIns="0" tIns="0" rIns="0" bIns="0" anchor="t" anchorCtr="0">
-            <a:spAutoFit/>
-          </a:bodyPr>
-          <a:lstStyle/>
-          <a:p>
-            <a:pPr marL="0" marR="0" lvl="0" indent="0" algn="l" rtl="0">
-              <a:spcBef>
-                <a:spcPts val="0"/>
-              </a:spcBef>
-              <a:spcAft>
-                <a:spcPts val="0"/>
-              </a:spcAft>
-              <a:buNone/>
-            </a:pPr>
-            <a:r>
-              <a:rPr lang="en-US" sz="3600" b="1" i="0" u="none" strike="noStrike" cap="none" dirty="0">
-                <a:solidFill>
-                  <a:schemeClr val="bg2">
-                    <a:lumMod val="60000"/>
-                    <a:lumOff val="40000"/>
-                  </a:schemeClr>
-                </a:solidFill>
-                <a:latin typeface="+mn-lt"/>
-                <a:ea typeface="Merriweather"/>
-                <a:cs typeface="Merriweather"/>
-                <a:sym typeface="Merriweather"/>
-              </a:rPr>
-              <a:t>Session Resources</a:t>
-            </a:r>
-            <a:endParaRPr dirty="0">
-              <a:solidFill>
-                <a:schemeClr val="bg2">
-                  <a:lumMod val="60000"/>
-                  <a:lumOff val="40000"/>
-                </a:schemeClr>
-              </a:solidFill>
-              <a:latin typeface="+mn-lt"/>
-            </a:endParaRPr>
-          </a:p>
-        </p:txBody>
-      </p:sp>
-    </p:spTree>
-  </p:cSld>
-  <p:clrMapOvr>
-    <a:masterClrMapping/>
-  </p:clrMapOvr>
-</p:sld>
-</file>
-
-<file path=ppt/slides/slide17.xml><?xml version="1.0" encoding="utf-8"?>
+<file path=ppt/slides/slide14.xml><?xml version="1.0" encoding="utf-8"?>
 <p:sld xmlns:a="http://schemas.openxmlformats.org/drawingml/2006/main" xmlns:r="http://schemas.openxmlformats.org/officeDocument/2006/relationships" xmlns:p="http://schemas.openxmlformats.org/presentationml/2006/main">
   <p:cSld>
     <p:bg>
@@ -17008,7 +15426,7 @@
         <p:spPr>
           <a:xfrm>
             <a:off x="571500" y="3901729"/>
-            <a:ext cx="3350505" cy="1034129"/>
+            <a:ext cx="3350505" cy="1181862"/>
           </a:xfrm>
           <a:prstGeom prst="rect">
             <a:avLst/>
@@ -17037,7 +15455,7 @@
               <a:buNone/>
             </a:pPr>
             <a:r>
-              <a:rPr lang="en-US" b="0" i="0" u="none" strike="noStrike" cap="none" dirty="0">
+              <a:rPr lang="en-US" sz="1600" b="0" i="0" u="none" strike="noStrike" cap="none" dirty="0">
                 <a:solidFill>
                   <a:schemeClr val="tx1"/>
                 </a:solidFill>
@@ -17048,7 +15466,7 @@
               </a:rPr>
               <a:t>Distinguish between passive, active, sentinel, and syndromic surveillance methods.</a:t>
             </a:r>
-            <a:endParaRPr dirty="0">
+            <a:endParaRPr sz="1600" dirty="0">
               <a:solidFill>
                 <a:schemeClr val="tx1"/>
               </a:solidFill>
@@ -17121,7 +15539,7 @@
         <p:spPr>
           <a:xfrm>
             <a:off x="4835426" y="3901729"/>
-            <a:ext cx="2901850" cy="1034129"/>
+            <a:ext cx="2901850" cy="1181862"/>
           </a:xfrm>
           <a:prstGeom prst="rect">
             <a:avLst/>
@@ -17150,7 +15568,7 @@
               <a:buNone/>
             </a:pPr>
             <a:r>
-              <a:rPr lang="en-US" b="0" i="0" u="none" strike="noStrike" cap="none" dirty="0">
+              <a:rPr lang="en-US" sz="1600" b="0" i="0" u="none" strike="noStrike" cap="none" dirty="0">
                 <a:solidFill>
                   <a:schemeClr val="tx1"/>
                 </a:solidFill>
@@ -17161,7 +15579,7 @@
               </a:rPr>
               <a:t>Utilize ICD-O-3, staging systems, and reportability rules to classify cases accurately.</a:t>
             </a:r>
-            <a:endParaRPr dirty="0">
+            <a:endParaRPr sz="1600" dirty="0">
               <a:solidFill>
                 <a:schemeClr val="tx1"/>
               </a:solidFill>
@@ -17234,7 +15652,7 @@
         <p:spPr>
           <a:xfrm>
             <a:off x="8588345" y="3901729"/>
-            <a:ext cx="2571609" cy="1034129"/>
+            <a:ext cx="2571609" cy="1181862"/>
           </a:xfrm>
           <a:prstGeom prst="rect">
             <a:avLst/>
@@ -17263,7 +15681,7 @@
               <a:buNone/>
             </a:pPr>
             <a:r>
-              <a:rPr lang="en-US" b="0" i="0" u="none" strike="noStrike" cap="none" dirty="0">
+              <a:rPr lang="en-US" sz="1600" b="0" i="0" u="none" strike="noStrike" cap="none" dirty="0">
                 <a:solidFill>
                   <a:schemeClr val="tx1"/>
                 </a:solidFill>
@@ -17274,7 +15692,7 @@
               </a:rPr>
               <a:t>Map the end-to-end data lifecycle from case finding to quality reporting.</a:t>
             </a:r>
-            <a:endParaRPr dirty="0">
+            <a:endParaRPr sz="1600" dirty="0">
               <a:solidFill>
                 <a:schemeClr val="tx1"/>
               </a:solidFill>
@@ -18543,780 +16961,6 @@
 </file>
 
 <file path=ppt/slides/slide7.xml><?xml version="1.0" encoding="utf-8"?>
-<p:sld xmlns:a="http://schemas.openxmlformats.org/drawingml/2006/main" xmlns:r="http://schemas.openxmlformats.org/officeDocument/2006/relationships" xmlns:p="http://schemas.openxmlformats.org/presentationml/2006/main">
-  <p:cSld>
-    <p:bg>
-      <p:bgPr>
-        <a:solidFill>
-          <a:srgbClr val="FFFFFF"/>
-        </a:solidFill>
-        <a:effectLst/>
-      </p:bgPr>
-    </p:bg>
-    <p:spTree>
-      <p:nvGrpSpPr>
-        <p:cNvPr id="1" name="Shape 208"/>
-        <p:cNvGrpSpPr/>
-        <p:nvPr/>
-      </p:nvGrpSpPr>
-      <p:grpSpPr>
-        <a:xfrm>
-          <a:off x="0" y="0"/>
-          <a:ext cx="0" cy="0"/>
-          <a:chOff x="0" y="0"/>
-          <a:chExt cx="0" cy="0"/>
-        </a:xfrm>
-      </p:grpSpPr>
-      <p:pic>
-        <p:nvPicPr>
-          <p:cNvPr id="209" name="Google Shape;209;p21" descr="image.png"/>
-          <p:cNvPicPr preferRelativeResize="0"/>
-          <p:nvPr/>
-        </p:nvPicPr>
-        <p:blipFill rotWithShape="1">
-          <a:blip r:embed="rId3">
-            <a:alphaModFix/>
-          </a:blip>
-          <a:srcRect/>
-          <a:stretch/>
-        </p:blipFill>
-        <p:spPr>
-          <a:xfrm>
-            <a:off x="19050" y="0"/>
-            <a:ext cx="12192000" cy="6858000"/>
-          </a:xfrm>
-          <a:prstGeom prst="rect">
-            <a:avLst/>
-          </a:prstGeom>
-          <a:noFill/>
-          <a:ln>
-            <a:noFill/>
-          </a:ln>
-        </p:spPr>
-      </p:pic>
-      <p:sp>
-        <p:nvSpPr>
-          <p:cNvPr id="211" name="Google Shape;211;p21"/>
-          <p:cNvSpPr txBox="1"/>
-          <p:nvPr/>
-        </p:nvSpPr>
-        <p:spPr>
-          <a:xfrm>
-            <a:off x="1609725" y="4870307"/>
-            <a:ext cx="9920288" cy="492443"/>
-          </a:xfrm>
-          <a:prstGeom prst="rect">
-            <a:avLst/>
-          </a:prstGeom>
-          <a:noFill/>
-          <a:ln>
-            <a:noFill/>
-          </a:ln>
-        </p:spPr>
-        <p:txBody>
-          <a:bodyPr spcFirstLastPara="1" wrap="square" lIns="0" tIns="0" rIns="0" bIns="0" anchor="t" anchorCtr="0">
-            <a:spAutoFit/>
-          </a:bodyPr>
-          <a:lstStyle/>
-          <a:p>
-            <a:pPr marL="0" marR="0" lvl="0" indent="0" algn="l" rtl="0">
-              <a:lnSpc>
-                <a:spcPct val="160000"/>
-              </a:lnSpc>
-              <a:spcBef>
-                <a:spcPts val="0"/>
-              </a:spcBef>
-              <a:spcAft>
-                <a:spcPts val="0"/>
-              </a:spcAft>
-              <a:buNone/>
-            </a:pPr>
-            <a:r>
-              <a:rPr lang="en-US" sz="2000" b="1" i="0" u="none" strike="noStrike" cap="none" dirty="0">
-                <a:solidFill>
-                  <a:schemeClr val="tx1"/>
-                </a:solidFill>
-                <a:latin typeface="+mn-lt"/>
-                <a:ea typeface="DM Sans"/>
-                <a:cs typeface="DM Sans"/>
-                <a:sym typeface="DM Sans"/>
-              </a:rPr>
-              <a:t>Effective surveillance identifies at-risk populations to target these interventions.</a:t>
-            </a:r>
-            <a:endParaRPr sz="2000" b="1" dirty="0">
-              <a:solidFill>
-                <a:schemeClr val="tx1"/>
-              </a:solidFill>
-              <a:latin typeface="+mn-lt"/>
-            </a:endParaRPr>
-          </a:p>
-        </p:txBody>
-      </p:sp>
-      <p:sp>
-        <p:nvSpPr>
-          <p:cNvPr id="221" name="Google Shape;221;p21"/>
-          <p:cNvSpPr txBox="1"/>
-          <p:nvPr/>
-        </p:nvSpPr>
-        <p:spPr>
-          <a:xfrm>
-            <a:off x="432847" y="257696"/>
-            <a:ext cx="11601450" cy="553998"/>
-          </a:xfrm>
-          <a:prstGeom prst="rect">
-            <a:avLst/>
-          </a:prstGeom>
-          <a:noFill/>
-          <a:ln>
-            <a:noFill/>
-          </a:ln>
-        </p:spPr>
-        <p:txBody>
-          <a:bodyPr spcFirstLastPara="1" wrap="square" lIns="0" tIns="0" rIns="0" bIns="0" anchor="t" anchorCtr="0">
-            <a:spAutoFit/>
-          </a:bodyPr>
-          <a:lstStyle/>
-          <a:p>
-            <a:pPr marL="0" marR="0" lvl="0" indent="0" algn="l" rtl="0">
-              <a:spcBef>
-                <a:spcPts val="0"/>
-              </a:spcBef>
-              <a:spcAft>
-                <a:spcPts val="0"/>
-              </a:spcAft>
-              <a:buNone/>
-            </a:pPr>
-            <a:r>
-              <a:rPr lang="en-US" sz="3600" b="1" i="0" u="none" strike="noStrike" cap="none" dirty="0">
-                <a:solidFill>
-                  <a:schemeClr val="bg2">
-                    <a:lumMod val="60000"/>
-                    <a:lumOff val="40000"/>
-                  </a:schemeClr>
-                </a:solidFill>
-                <a:latin typeface="+mn-lt"/>
-                <a:ea typeface="Merriweather"/>
-                <a:cs typeface="Merriweather"/>
-                <a:sym typeface="Merriweather"/>
-              </a:rPr>
-              <a:t>From Data to Screening</a:t>
-            </a:r>
-            <a:endParaRPr dirty="0">
-              <a:solidFill>
-                <a:schemeClr val="bg2">
-                  <a:lumMod val="60000"/>
-                  <a:lumOff val="40000"/>
-                </a:schemeClr>
-              </a:solidFill>
-              <a:latin typeface="+mn-lt"/>
-            </a:endParaRPr>
-          </a:p>
-        </p:txBody>
-      </p:sp>
-      <p:grpSp>
-        <p:nvGrpSpPr>
-          <p:cNvPr id="12" name="Group 11">
-            <a:extLst>
-              <a:ext uri="{FF2B5EF4-FFF2-40B4-BE49-F238E27FC236}">
-                <a16:creationId xmlns:a16="http://schemas.microsoft.com/office/drawing/2014/main" id="{A1E70736-D547-10D5-AE8A-0F37A9C3F041}"/>
-              </a:ext>
-            </a:extLst>
-          </p:cNvPr>
-          <p:cNvGrpSpPr/>
-          <p:nvPr/>
-        </p:nvGrpSpPr>
-        <p:grpSpPr>
-          <a:xfrm>
-            <a:off x="656173" y="1495250"/>
-            <a:ext cx="4955914" cy="2462213"/>
-            <a:chOff x="6756935" y="2029945"/>
-            <a:chExt cx="4955914" cy="2462213"/>
-          </a:xfrm>
-        </p:grpSpPr>
-        <p:sp>
-          <p:nvSpPr>
-            <p:cNvPr id="7" name="Google Shape;212;p21">
-              <a:extLst>
-                <a:ext uri="{FF2B5EF4-FFF2-40B4-BE49-F238E27FC236}">
-                  <a16:creationId xmlns:a16="http://schemas.microsoft.com/office/drawing/2014/main" id="{4CFC0A47-FE08-6BA1-493D-F2E5C6A359DA}"/>
-                </a:ext>
-              </a:extLst>
-            </p:cNvPr>
-            <p:cNvSpPr txBox="1"/>
-            <p:nvPr/>
-          </p:nvSpPr>
-          <p:spPr>
-            <a:xfrm>
-              <a:off x="7188474" y="2029945"/>
-              <a:ext cx="4524375" cy="2462213"/>
-            </a:xfrm>
-            <a:prstGeom prst="rect">
-              <a:avLst/>
-            </a:prstGeom>
-            <a:noFill/>
-            <a:ln>
-              <a:noFill/>
-            </a:ln>
-          </p:spPr>
-          <p:txBody>
-            <a:bodyPr spcFirstLastPara="1" wrap="square" lIns="0" tIns="0" rIns="0" bIns="0" anchor="t" anchorCtr="0">
-              <a:spAutoFit/>
-            </a:bodyPr>
-            <a:lstStyle/>
-            <a:p>
-              <a:pPr marL="0" marR="0" lvl="0" indent="0" algn="l" rtl="0">
-                <a:lnSpc>
-                  <a:spcPct val="250000"/>
-                </a:lnSpc>
-                <a:spcBef>
-                  <a:spcPts val="0"/>
-                </a:spcBef>
-                <a:spcAft>
-                  <a:spcPts val="0"/>
-                </a:spcAft>
-                <a:buNone/>
-              </a:pPr>
-              <a:r>
-                <a:rPr lang="en-US" sz="1600" b="1" i="0" u="none" strike="noStrike" cap="none" dirty="0">
-                  <a:solidFill>
-                    <a:schemeClr val="tx1"/>
-                  </a:solidFill>
-                  <a:latin typeface="+mn-lt"/>
-                  <a:ea typeface="DM Sans"/>
-                  <a:cs typeface="DM Sans"/>
-                  <a:sym typeface="DM Sans"/>
-                </a:rPr>
-                <a:t>Lung:</a:t>
-              </a:r>
-              <a:r>
-                <a:rPr lang="en-US" sz="1600" b="0" i="0" u="none" strike="noStrike" cap="none" dirty="0">
-                  <a:solidFill>
-                    <a:schemeClr val="tx1"/>
-                  </a:solidFill>
-                  <a:latin typeface="+mn-lt"/>
-                  <a:ea typeface="DM Sans"/>
-                  <a:cs typeface="DM Sans"/>
-                  <a:sym typeface="DM Sans"/>
-                </a:rPr>
-                <a:t> Low-dose CT for high-risk smokers.</a:t>
-              </a:r>
-            </a:p>
-            <a:p>
-              <a:pPr>
-                <a:lnSpc>
-                  <a:spcPct val="250000"/>
-                </a:lnSpc>
-              </a:pPr>
-              <a:r>
-                <a:rPr lang="en-US" sz="1600" b="1" dirty="0">
-                  <a:solidFill>
-                    <a:schemeClr val="tx1"/>
-                  </a:solidFill>
-                  <a:latin typeface="+mn-lt"/>
-                  <a:ea typeface="DM Sans"/>
-                  <a:cs typeface="DM Sans"/>
-                  <a:sym typeface="DM Sans"/>
-                </a:rPr>
-                <a:t>Breast:</a:t>
-              </a:r>
-              <a:r>
-                <a:rPr lang="en-US" sz="1600" dirty="0">
-                  <a:solidFill>
-                    <a:schemeClr val="tx1"/>
-                  </a:solidFill>
-                  <a:latin typeface="+mn-lt"/>
-                  <a:ea typeface="DM Sans"/>
-                  <a:cs typeface="DM Sans"/>
-                  <a:sym typeface="DM Sans"/>
-                </a:rPr>
-                <a:t> Mammograms for women 40+.</a:t>
-              </a:r>
-              <a:endParaRPr lang="en-US" sz="1600" dirty="0">
-                <a:solidFill>
-                  <a:schemeClr val="tx1"/>
-                </a:solidFill>
-                <a:latin typeface="+mn-lt"/>
-              </a:endParaRPr>
-            </a:p>
-            <a:p>
-              <a:pPr>
-                <a:lnSpc>
-                  <a:spcPct val="250000"/>
-                </a:lnSpc>
-              </a:pPr>
-              <a:r>
-                <a:rPr lang="en-US" sz="1600" b="1" dirty="0">
-                  <a:solidFill>
-                    <a:schemeClr val="tx1"/>
-                  </a:solidFill>
-                  <a:latin typeface="+mn-lt"/>
-                  <a:ea typeface="DM Sans"/>
-                  <a:cs typeface="DM Sans"/>
-                  <a:sym typeface="DM Sans"/>
-                </a:rPr>
-                <a:t>Colorectal:</a:t>
-              </a:r>
-              <a:r>
-                <a:rPr lang="en-US" sz="1600" dirty="0">
-                  <a:solidFill>
-                    <a:schemeClr val="tx1"/>
-                  </a:solidFill>
-                  <a:latin typeface="+mn-lt"/>
-                  <a:ea typeface="DM Sans"/>
-                  <a:cs typeface="DM Sans"/>
-                  <a:sym typeface="DM Sans"/>
-                </a:rPr>
-                <a:t> Colonoscopy or Stool tests for 45+.</a:t>
-              </a:r>
-              <a:endParaRPr lang="en-US" sz="1600" dirty="0">
-                <a:solidFill>
-                  <a:schemeClr val="tx1"/>
-                </a:solidFill>
-                <a:latin typeface="+mn-lt"/>
-              </a:endParaRPr>
-            </a:p>
-            <a:p>
-              <a:pPr>
-                <a:lnSpc>
-                  <a:spcPct val="250000"/>
-                </a:lnSpc>
-              </a:pPr>
-              <a:r>
-                <a:rPr lang="en-US" sz="1600" b="1" dirty="0">
-                  <a:solidFill>
-                    <a:schemeClr val="tx1"/>
-                  </a:solidFill>
-                  <a:latin typeface="+mn-lt"/>
-                  <a:ea typeface="DM Sans"/>
-                  <a:cs typeface="DM Sans"/>
-                  <a:sym typeface="DM Sans"/>
-                </a:rPr>
-                <a:t>Prostate:</a:t>
-              </a:r>
-              <a:r>
-                <a:rPr lang="en-US" sz="1600" dirty="0">
-                  <a:solidFill>
-                    <a:schemeClr val="tx1"/>
-                  </a:solidFill>
-                  <a:latin typeface="+mn-lt"/>
-                  <a:ea typeface="DM Sans"/>
-                  <a:cs typeface="DM Sans"/>
-                  <a:sym typeface="DM Sans"/>
-                </a:rPr>
-                <a:t> PSA testing for men 45+.</a:t>
-              </a:r>
-              <a:endParaRPr lang="en-US" sz="1600" dirty="0">
-                <a:solidFill>
-                  <a:schemeClr val="tx1"/>
-                </a:solidFill>
-                <a:latin typeface="+mn-lt"/>
-              </a:endParaRPr>
-            </a:p>
-          </p:txBody>
-        </p:sp>
-        <p:pic>
-          <p:nvPicPr>
-            <p:cNvPr id="8" name="Google Shape;217;p21" descr="image.png">
-              <a:extLst>
-                <a:ext uri="{FF2B5EF4-FFF2-40B4-BE49-F238E27FC236}">
-                  <a16:creationId xmlns:a16="http://schemas.microsoft.com/office/drawing/2014/main" id="{47BAC05E-0999-0E6C-9F2E-7C9B4B87DFF3}"/>
-                </a:ext>
-              </a:extLst>
-            </p:cNvPr>
-            <p:cNvPicPr preferRelativeResize="0"/>
-            <p:nvPr/>
-          </p:nvPicPr>
-          <p:blipFill rotWithShape="1">
-            <a:blip r:embed="rId4">
-              <a:alphaModFix/>
-            </a:blip>
-            <a:srcRect/>
-            <a:stretch/>
-          </p:blipFill>
-          <p:spPr>
-            <a:xfrm>
-              <a:off x="6756935" y="2248684"/>
-              <a:ext cx="285750" cy="228600"/>
-            </a:xfrm>
-            <a:prstGeom prst="rect">
-              <a:avLst/>
-            </a:prstGeom>
-            <a:noFill/>
-            <a:ln>
-              <a:noFill/>
-            </a:ln>
-          </p:spPr>
-        </p:pic>
-        <p:pic>
-          <p:nvPicPr>
-            <p:cNvPr id="9" name="Google Shape;218;p21" descr="image.png">
-              <a:extLst>
-                <a:ext uri="{FF2B5EF4-FFF2-40B4-BE49-F238E27FC236}">
-                  <a16:creationId xmlns:a16="http://schemas.microsoft.com/office/drawing/2014/main" id="{3C4D9CA3-1153-4E68-2543-6B686D2094EB}"/>
-                </a:ext>
-              </a:extLst>
-            </p:cNvPr>
-            <p:cNvPicPr preferRelativeResize="0"/>
-            <p:nvPr/>
-          </p:nvPicPr>
-          <p:blipFill rotWithShape="1">
-            <a:blip r:embed="rId5">
-              <a:alphaModFix/>
-            </a:blip>
-            <a:srcRect/>
-            <a:stretch/>
-          </p:blipFill>
-          <p:spPr>
-            <a:xfrm>
-              <a:off x="6817895" y="2906455"/>
-              <a:ext cx="200025" cy="228600"/>
-            </a:xfrm>
-            <a:prstGeom prst="rect">
-              <a:avLst/>
-            </a:prstGeom>
-            <a:noFill/>
-            <a:ln>
-              <a:noFill/>
-            </a:ln>
-          </p:spPr>
-        </p:pic>
-        <p:pic>
-          <p:nvPicPr>
-            <p:cNvPr id="10" name="Google Shape;219;p21" descr="image.png">
-              <a:extLst>
-                <a:ext uri="{FF2B5EF4-FFF2-40B4-BE49-F238E27FC236}">
-                  <a16:creationId xmlns:a16="http://schemas.microsoft.com/office/drawing/2014/main" id="{28D3F83A-4663-3A43-F111-2AD89E728D80}"/>
-                </a:ext>
-              </a:extLst>
-            </p:cNvPr>
-            <p:cNvPicPr preferRelativeResize="0"/>
-            <p:nvPr/>
-          </p:nvPicPr>
-          <p:blipFill rotWithShape="1">
-            <a:blip r:embed="rId6">
-              <a:alphaModFix/>
-            </a:blip>
-            <a:srcRect/>
-            <a:stretch/>
-          </p:blipFill>
-          <p:spPr>
-            <a:xfrm>
-              <a:off x="6807735" y="3523585"/>
-              <a:ext cx="228600" cy="228600"/>
-            </a:xfrm>
-            <a:prstGeom prst="rect">
-              <a:avLst/>
-            </a:prstGeom>
-            <a:noFill/>
-            <a:ln>
-              <a:noFill/>
-            </a:ln>
-          </p:spPr>
-        </p:pic>
-        <p:pic>
-          <p:nvPicPr>
-            <p:cNvPr id="11" name="Google Shape;220;p21" descr="image.png">
-              <a:extLst>
-                <a:ext uri="{FF2B5EF4-FFF2-40B4-BE49-F238E27FC236}">
-                  <a16:creationId xmlns:a16="http://schemas.microsoft.com/office/drawing/2014/main" id="{2E379064-614C-D3A6-996A-981D074D40FE}"/>
-                </a:ext>
-              </a:extLst>
-            </p:cNvPr>
-            <p:cNvPicPr preferRelativeResize="0"/>
-            <p:nvPr/>
-          </p:nvPicPr>
-          <p:blipFill rotWithShape="1">
-            <a:blip r:embed="rId7">
-              <a:alphaModFix/>
-            </a:blip>
-            <a:srcRect/>
-            <a:stretch/>
-          </p:blipFill>
-          <p:spPr>
-            <a:xfrm>
-              <a:off x="6795670" y="4140715"/>
-              <a:ext cx="200025" cy="228600"/>
-            </a:xfrm>
-            <a:prstGeom prst="rect">
-              <a:avLst/>
-            </a:prstGeom>
-            <a:noFill/>
-            <a:ln>
-              <a:noFill/>
-            </a:ln>
-          </p:spPr>
-        </p:pic>
-      </p:grpSp>
-      <p:pic>
-        <p:nvPicPr>
-          <p:cNvPr id="2" name="Picture 1">
-            <a:extLst>
-              <a:ext uri="{FF2B5EF4-FFF2-40B4-BE49-F238E27FC236}">
-                <a16:creationId xmlns:a16="http://schemas.microsoft.com/office/drawing/2014/main" id="{19BDBEBB-00E4-8D7D-24ED-2F0574C44990}"/>
-              </a:ext>
-            </a:extLst>
-          </p:cNvPr>
-          <p:cNvPicPr>
-            <a:picLocks noChangeAspect="1"/>
-          </p:cNvPicPr>
-          <p:nvPr/>
-        </p:nvPicPr>
-        <p:blipFill>
-          <a:blip r:embed="rId8"/>
-          <a:srcRect l="6866" t="6815" r="5465" b="18577"/>
-          <a:stretch>
-            <a:fillRect/>
-          </a:stretch>
-        </p:blipFill>
-        <p:spPr>
-          <a:xfrm>
-            <a:off x="5428944" y="1512340"/>
-            <a:ext cx="6605353" cy="2462213"/>
-          </a:xfrm>
-          <a:prstGeom prst="rect">
-            <a:avLst/>
-          </a:prstGeom>
-        </p:spPr>
-      </p:pic>
-    </p:spTree>
-  </p:cSld>
-  <p:clrMapOvr>
-    <a:masterClrMapping/>
-  </p:clrMapOvr>
-</p:sld>
-</file>
-
-<file path=ppt/slides/slide8.xml><?xml version="1.0" encoding="utf-8"?>
-<p:sld xmlns:a="http://schemas.openxmlformats.org/drawingml/2006/main" xmlns:r="http://schemas.openxmlformats.org/officeDocument/2006/relationships" xmlns:p="http://schemas.openxmlformats.org/presentationml/2006/main">
-  <p:cSld>
-    <p:bg>
-      <p:bgPr>
-        <a:solidFill>
-          <a:srgbClr val="FFFFFF"/>
-        </a:solidFill>
-        <a:effectLst/>
-      </p:bgPr>
-    </p:bg>
-    <p:spTree>
-      <p:nvGrpSpPr>
-        <p:cNvPr id="1" name="Shape 226"/>
-        <p:cNvGrpSpPr/>
-        <p:nvPr/>
-      </p:nvGrpSpPr>
-      <p:grpSpPr>
-        <a:xfrm>
-          <a:off x="0" y="0"/>
-          <a:ext cx="0" cy="0"/>
-          <a:chOff x="0" y="0"/>
-          <a:chExt cx="0" cy="0"/>
-        </a:xfrm>
-      </p:grpSpPr>
-      <p:pic>
-        <p:nvPicPr>
-          <p:cNvPr id="227" name="Google Shape;227;p22" descr="image.png"/>
-          <p:cNvPicPr preferRelativeResize="0"/>
-          <p:nvPr/>
-        </p:nvPicPr>
-        <p:blipFill rotWithShape="1">
-          <a:blip r:embed="rId3">
-            <a:alphaModFix/>
-          </a:blip>
-          <a:srcRect/>
-          <a:stretch/>
-        </p:blipFill>
-        <p:spPr>
-          <a:xfrm>
-            <a:off x="0" y="0"/>
-            <a:ext cx="12192000" cy="6858000"/>
-          </a:xfrm>
-          <a:prstGeom prst="rect">
-            <a:avLst/>
-          </a:prstGeom>
-          <a:noFill/>
-          <a:ln>
-            <a:noFill/>
-          </a:ln>
-        </p:spPr>
-      </p:pic>
-      <p:sp>
-        <p:nvSpPr>
-          <p:cNvPr id="228" name="Google Shape;228;p22"/>
-          <p:cNvSpPr txBox="1"/>
-          <p:nvPr/>
-        </p:nvSpPr>
-        <p:spPr>
-          <a:xfrm>
-            <a:off x="300037" y="352709"/>
-            <a:ext cx="8215313" cy="689420"/>
-          </a:xfrm>
-          <a:prstGeom prst="rect">
-            <a:avLst/>
-          </a:prstGeom>
-          <a:noFill/>
-          <a:ln>
-            <a:noFill/>
-          </a:ln>
-        </p:spPr>
-        <p:txBody>
-          <a:bodyPr spcFirstLastPara="1" wrap="square" lIns="0" tIns="0" rIns="0" bIns="0" anchor="t" anchorCtr="0">
-            <a:spAutoFit/>
-          </a:bodyPr>
-          <a:lstStyle/>
-          <a:p>
-            <a:pPr marL="0" marR="0" lvl="0" indent="0" rtl="0">
-              <a:lnSpc>
-                <a:spcPct val="139968"/>
-              </a:lnSpc>
-              <a:spcBef>
-                <a:spcPts val="0"/>
-              </a:spcBef>
-              <a:spcAft>
-                <a:spcPts val="0"/>
-              </a:spcAft>
-              <a:buNone/>
-            </a:pPr>
-            <a:r>
-              <a:rPr lang="en-US" sz="3200" b="1" i="0" u="none" strike="noStrike" cap="none" dirty="0">
-                <a:solidFill>
-                  <a:schemeClr val="bg2">
-                    <a:lumMod val="60000"/>
-                    <a:lumOff val="40000"/>
-                  </a:schemeClr>
-                </a:solidFill>
-                <a:latin typeface="Arial" panose="020B0604020202020204" pitchFamily="34" charset="0"/>
-                <a:ea typeface="Merriweather"/>
-                <a:cs typeface="Arial" panose="020B0604020202020204" pitchFamily="34" charset="0"/>
-                <a:sym typeface="Merriweather"/>
-              </a:rPr>
-              <a:t>Right Data → Right Test → Right Time</a:t>
-            </a:r>
-            <a:endParaRPr sz="3200" b="1" dirty="0">
-              <a:solidFill>
-                <a:schemeClr val="bg2">
-                  <a:lumMod val="60000"/>
-                  <a:lumOff val="40000"/>
-                </a:schemeClr>
-              </a:solidFill>
-              <a:latin typeface="Arial" panose="020B0604020202020204" pitchFamily="34" charset="0"/>
-              <a:cs typeface="Arial" panose="020B0604020202020204" pitchFamily="34" charset="0"/>
-            </a:endParaRPr>
-          </a:p>
-        </p:txBody>
-      </p:sp>
-      <p:sp>
-        <p:nvSpPr>
-          <p:cNvPr id="229" name="Google Shape;229;p22"/>
-          <p:cNvSpPr txBox="1"/>
-          <p:nvPr/>
-        </p:nvSpPr>
-        <p:spPr>
-          <a:xfrm>
-            <a:off x="6096000" y="3230875"/>
-            <a:ext cx="6609229" cy="492443"/>
-          </a:xfrm>
-          <a:prstGeom prst="rect">
-            <a:avLst/>
-          </a:prstGeom>
-          <a:noFill/>
-          <a:ln>
-            <a:noFill/>
-          </a:ln>
-        </p:spPr>
-        <p:txBody>
-          <a:bodyPr spcFirstLastPara="1" wrap="square" lIns="0" tIns="0" rIns="0" bIns="0" anchor="t" anchorCtr="0">
-            <a:spAutoFit/>
-          </a:bodyPr>
-          <a:lstStyle/>
-          <a:p>
-            <a:pPr marL="0" marR="0" lvl="0" indent="0" algn="l" rtl="0">
-              <a:lnSpc>
-                <a:spcPct val="159944"/>
-              </a:lnSpc>
-              <a:spcBef>
-                <a:spcPts val="0"/>
-              </a:spcBef>
-              <a:spcAft>
-                <a:spcPts val="0"/>
-              </a:spcAft>
-              <a:buNone/>
-            </a:pPr>
-            <a:r>
-              <a:rPr lang="en-US" sz="2000" b="1" i="0" u="none" strike="noStrike" cap="none" dirty="0">
-                <a:solidFill>
-                  <a:schemeClr val="tx1"/>
-                </a:solidFill>
-                <a:latin typeface="+mn-lt"/>
-                <a:ea typeface="DM Sans"/>
-                <a:cs typeface="DM Sans"/>
-                <a:sym typeface="DM Sans"/>
-              </a:rPr>
-              <a:t>Surveillance turns signals into saved lives.</a:t>
-            </a:r>
-            <a:endParaRPr sz="2000" b="1" dirty="0">
-              <a:solidFill>
-                <a:schemeClr val="tx1"/>
-              </a:solidFill>
-              <a:latin typeface="+mn-lt"/>
-            </a:endParaRPr>
-          </a:p>
-        </p:txBody>
-      </p:sp>
-      <p:pic>
-        <p:nvPicPr>
-          <p:cNvPr id="2" name="Picture 2" descr="What kind of cancer screening test do we need to undergo?">
-            <a:extLst>
-              <a:ext uri="{FF2B5EF4-FFF2-40B4-BE49-F238E27FC236}">
-                <a16:creationId xmlns:a16="http://schemas.microsoft.com/office/drawing/2014/main" id="{E0D88268-8C60-7367-A946-CB334BC4745B}"/>
-              </a:ext>
-            </a:extLst>
-          </p:cNvPr>
-          <p:cNvPicPr>
-            <a:picLocks noChangeAspect="1" noChangeArrowheads="1"/>
-          </p:cNvPicPr>
-          <p:nvPr/>
-        </p:nvPicPr>
-        <p:blipFill rotWithShape="1">
-          <a:blip r:embed="rId4">
-            <a:extLst>
-              <a:ext uri="{28A0092B-C50C-407E-A947-70E740481C1C}">
-                <a14:useLocalDpi xmlns:a14="http://schemas.microsoft.com/office/drawing/2010/main" val="0"/>
-              </a:ext>
-            </a:extLst>
-          </a:blip>
-          <a:srcRect l="7725" t="8036" r="6691" b="7032"/>
-          <a:stretch>
-            <a:fillRect/>
-          </a:stretch>
-        </p:blipFill>
-        <p:spPr bwMode="auto">
-          <a:xfrm>
-            <a:off x="621943" y="1394838"/>
-            <a:ext cx="4960828" cy="4918519"/>
-          </a:xfrm>
-          <a:prstGeom prst="rect">
-            <a:avLst/>
-          </a:prstGeom>
-          <a:noFill/>
-          <a:extLst>
-            <a:ext uri="{909E8E84-426E-40DD-AFC4-6F175D3DCCD1}">
-              <a14:hiddenFill xmlns:a14="http://schemas.microsoft.com/office/drawing/2010/main">
-                <a:solidFill>
-                  <a:srgbClr val="FFFFFF"/>
-                </a:solidFill>
-              </a14:hiddenFill>
-            </a:ext>
-          </a:extLst>
-        </p:spPr>
-      </p:pic>
-    </p:spTree>
-  </p:cSld>
-  <p:clrMapOvr>
-    <a:masterClrMapping/>
-  </p:clrMapOvr>
-</p:sld>
-</file>
-
-<file path=ppt/slides/slide9.xml><?xml version="1.0" encoding="utf-8"?>
 <p:sld xmlns:a="http://schemas.openxmlformats.org/drawingml/2006/main" xmlns:r="http://schemas.openxmlformats.org/officeDocument/2006/relationships" xmlns:p="http://schemas.openxmlformats.org/presentationml/2006/main">
   <p:cSld>
     <p:bg>
@@ -20011,6 +17655,1279 @@
           </a:p>
         </p:txBody>
       </p:sp>
+    </p:spTree>
+  </p:cSld>
+  <p:clrMapOvr>
+    <a:masterClrMapping/>
+  </p:clrMapOvr>
+</p:sld>
+</file>
+
+<file path=ppt/slides/slide8.xml><?xml version="1.0" encoding="utf-8"?>
+<p:sld xmlns:a="http://schemas.openxmlformats.org/drawingml/2006/main" xmlns:r="http://schemas.openxmlformats.org/officeDocument/2006/relationships" xmlns:p="http://schemas.openxmlformats.org/presentationml/2006/main">
+  <p:cSld>
+    <p:bg>
+      <p:bgPr>
+        <a:solidFill>
+          <a:srgbClr val="FFFFFF"/>
+        </a:solidFill>
+        <a:effectLst/>
+      </p:bgPr>
+    </p:bg>
+    <p:spTree>
+      <p:nvGrpSpPr>
+        <p:cNvPr id="1" name="Shape 256"/>
+        <p:cNvGrpSpPr/>
+        <p:nvPr/>
+      </p:nvGrpSpPr>
+      <p:grpSpPr>
+        <a:xfrm>
+          <a:off x="0" y="0"/>
+          <a:ext cx="0" cy="0"/>
+          <a:chOff x="0" y="0"/>
+          <a:chExt cx="0" cy="0"/>
+        </a:xfrm>
+      </p:grpSpPr>
+      <p:pic>
+        <p:nvPicPr>
+          <p:cNvPr id="257" name="Google Shape;257;p24" descr="image.png"/>
+          <p:cNvPicPr preferRelativeResize="0"/>
+          <p:nvPr/>
+        </p:nvPicPr>
+        <p:blipFill rotWithShape="1">
+          <a:blip r:embed="rId3">
+            <a:alphaModFix/>
+          </a:blip>
+          <a:srcRect/>
+          <a:stretch/>
+        </p:blipFill>
+        <p:spPr>
+          <a:xfrm>
+            <a:off x="0" y="0"/>
+            <a:ext cx="12192000" cy="6858000"/>
+          </a:xfrm>
+          <a:prstGeom prst="rect">
+            <a:avLst/>
+          </a:prstGeom>
+          <a:noFill/>
+          <a:ln>
+            <a:noFill/>
+          </a:ln>
+        </p:spPr>
+      </p:pic>
+      <p:pic>
+        <p:nvPicPr>
+          <p:cNvPr id="259" name="Google Shape;259;p24" descr="image.png"/>
+          <p:cNvPicPr preferRelativeResize="0"/>
+          <p:nvPr/>
+        </p:nvPicPr>
+        <p:blipFill rotWithShape="1">
+          <a:blip r:embed="rId4">
+            <a:alphaModFix/>
+          </a:blip>
+          <a:srcRect/>
+          <a:stretch/>
+        </p:blipFill>
+        <p:spPr>
+          <a:xfrm>
+            <a:off x="4361798" y="2182652"/>
+            <a:ext cx="2682951" cy="2693877"/>
+          </a:xfrm>
+          <a:prstGeom prst="rect">
+            <a:avLst/>
+          </a:prstGeom>
+          <a:noFill/>
+          <a:ln>
+            <a:noFill/>
+          </a:ln>
+        </p:spPr>
+      </p:pic>
+      <p:sp>
+        <p:nvSpPr>
+          <p:cNvPr id="263" name="Google Shape;263;p24"/>
+          <p:cNvSpPr txBox="1"/>
+          <p:nvPr/>
+        </p:nvSpPr>
+        <p:spPr>
+          <a:xfrm>
+            <a:off x="4444441" y="2939509"/>
+            <a:ext cx="2117658" cy="276999"/>
+          </a:xfrm>
+          <a:prstGeom prst="rect">
+            <a:avLst/>
+          </a:prstGeom>
+          <a:noFill/>
+          <a:ln>
+            <a:noFill/>
+          </a:ln>
+        </p:spPr>
+        <p:txBody>
+          <a:bodyPr spcFirstLastPara="1" wrap="square" lIns="0" tIns="0" rIns="0" bIns="0" anchor="t" anchorCtr="0">
+            <a:spAutoFit/>
+          </a:bodyPr>
+          <a:lstStyle/>
+          <a:p>
+            <a:pPr marL="0" marR="0" lvl="0" indent="0" algn="ctr" rtl="0">
+              <a:spcBef>
+                <a:spcPts val="0"/>
+              </a:spcBef>
+              <a:spcAft>
+                <a:spcPts val="0"/>
+              </a:spcAft>
+              <a:buNone/>
+            </a:pPr>
+            <a:r>
+              <a:rPr lang="en-US" sz="1800" b="1" i="0" u="none" strike="noStrike" cap="none" dirty="0">
+                <a:solidFill>
+                  <a:schemeClr val="tx1"/>
+                </a:solidFill>
+                <a:latin typeface="+mn-lt"/>
+                <a:ea typeface="Merriweather"/>
+                <a:cs typeface="Merriweather"/>
+                <a:sym typeface="Merriweather"/>
+              </a:rPr>
+              <a:t>SEER Summary</a:t>
+            </a:r>
+            <a:endParaRPr dirty="0">
+              <a:solidFill>
+                <a:schemeClr val="tx1"/>
+              </a:solidFill>
+              <a:latin typeface="+mn-lt"/>
+            </a:endParaRPr>
+          </a:p>
+        </p:txBody>
+      </p:sp>
+      <p:pic>
+        <p:nvPicPr>
+          <p:cNvPr id="268" name="Google Shape;268;p24" descr="image.png"/>
+          <p:cNvPicPr preferRelativeResize="0"/>
+          <p:nvPr/>
+        </p:nvPicPr>
+        <p:blipFill rotWithShape="1">
+          <a:blip r:embed="rId5">
+            <a:alphaModFix/>
+          </a:blip>
+          <a:srcRect/>
+          <a:stretch/>
+        </p:blipFill>
+        <p:spPr>
+          <a:xfrm>
+            <a:off x="4869116" y="2274374"/>
+            <a:ext cx="785888" cy="620500"/>
+          </a:xfrm>
+          <a:prstGeom prst="rect">
+            <a:avLst/>
+          </a:prstGeom>
+          <a:noFill/>
+          <a:ln>
+            <a:noFill/>
+          </a:ln>
+        </p:spPr>
+      </p:pic>
+      <p:sp>
+        <p:nvSpPr>
+          <p:cNvPr id="270" name="Google Shape;270;p24"/>
+          <p:cNvSpPr txBox="1"/>
+          <p:nvPr/>
+        </p:nvSpPr>
+        <p:spPr>
+          <a:xfrm>
+            <a:off x="442913" y="376875"/>
+            <a:ext cx="7975737" cy="553998"/>
+          </a:xfrm>
+          <a:prstGeom prst="rect">
+            <a:avLst/>
+          </a:prstGeom>
+          <a:noFill/>
+          <a:ln>
+            <a:noFill/>
+          </a:ln>
+        </p:spPr>
+        <p:txBody>
+          <a:bodyPr spcFirstLastPara="1" wrap="square" lIns="0" tIns="0" rIns="0" bIns="0" anchor="t" anchorCtr="0">
+            <a:spAutoFit/>
+          </a:bodyPr>
+          <a:lstStyle/>
+          <a:p>
+            <a:pPr marL="0" marR="0" lvl="0" indent="0" algn="l" rtl="0">
+              <a:spcBef>
+                <a:spcPts val="0"/>
+              </a:spcBef>
+              <a:spcAft>
+                <a:spcPts val="0"/>
+              </a:spcAft>
+              <a:buNone/>
+            </a:pPr>
+            <a:r>
+              <a:rPr lang="en-US" sz="3600" b="1" i="0" u="none" strike="noStrike" cap="none" dirty="0">
+                <a:solidFill>
+                  <a:schemeClr val="bg2">
+                    <a:lumMod val="60000"/>
+                    <a:lumOff val="40000"/>
+                  </a:schemeClr>
+                </a:solidFill>
+                <a:latin typeface="+mn-lt"/>
+                <a:ea typeface="Merriweather"/>
+                <a:cs typeface="Merriweather"/>
+                <a:sym typeface="Merriweather"/>
+              </a:rPr>
+              <a:t>Staging &amp; Rules</a:t>
+            </a:r>
+            <a:endParaRPr dirty="0">
+              <a:solidFill>
+                <a:schemeClr val="bg2">
+                  <a:lumMod val="60000"/>
+                  <a:lumOff val="40000"/>
+                </a:schemeClr>
+              </a:solidFill>
+              <a:latin typeface="+mn-lt"/>
+            </a:endParaRPr>
+          </a:p>
+        </p:txBody>
+      </p:sp>
+      <p:pic>
+        <p:nvPicPr>
+          <p:cNvPr id="3" name="Google Shape;259;p24" descr="image.png">
+            <a:extLst>
+              <a:ext uri="{FF2B5EF4-FFF2-40B4-BE49-F238E27FC236}">
+                <a16:creationId xmlns:a16="http://schemas.microsoft.com/office/drawing/2014/main" id="{D6CB14F1-A39B-FC91-3783-82852922B483}"/>
+              </a:ext>
+            </a:extLst>
+          </p:cNvPr>
+          <p:cNvPicPr preferRelativeResize="0"/>
+          <p:nvPr/>
+        </p:nvPicPr>
+        <p:blipFill rotWithShape="1">
+          <a:blip r:embed="rId4">
+            <a:alphaModFix/>
+          </a:blip>
+          <a:srcRect/>
+          <a:stretch/>
+        </p:blipFill>
+        <p:spPr>
+          <a:xfrm>
+            <a:off x="804970" y="2182652"/>
+            <a:ext cx="2682951" cy="2693877"/>
+          </a:xfrm>
+          <a:prstGeom prst="rect">
+            <a:avLst/>
+          </a:prstGeom>
+          <a:noFill/>
+          <a:ln>
+            <a:noFill/>
+          </a:ln>
+        </p:spPr>
+      </p:pic>
+      <p:sp>
+        <p:nvSpPr>
+          <p:cNvPr id="4" name="Google Shape;261;p24">
+            <a:extLst>
+              <a:ext uri="{FF2B5EF4-FFF2-40B4-BE49-F238E27FC236}">
+                <a16:creationId xmlns:a16="http://schemas.microsoft.com/office/drawing/2014/main" id="{377CC6BF-3336-6AA5-8816-1E4488CAAB50}"/>
+              </a:ext>
+            </a:extLst>
+          </p:cNvPr>
+          <p:cNvSpPr txBox="1"/>
+          <p:nvPr/>
+        </p:nvSpPr>
+        <p:spPr>
+          <a:xfrm>
+            <a:off x="804971" y="3070752"/>
+            <a:ext cx="1817205" cy="276999"/>
+          </a:xfrm>
+          <a:prstGeom prst="rect">
+            <a:avLst/>
+          </a:prstGeom>
+          <a:noFill/>
+          <a:ln>
+            <a:noFill/>
+          </a:ln>
+        </p:spPr>
+        <p:txBody>
+          <a:bodyPr spcFirstLastPara="1" wrap="square" lIns="0" tIns="0" rIns="0" bIns="0" anchor="t" anchorCtr="0">
+            <a:spAutoFit/>
+          </a:bodyPr>
+          <a:lstStyle/>
+          <a:p>
+            <a:pPr marL="0" marR="0" lvl="0" indent="0" algn="ctr" rtl="0">
+              <a:spcBef>
+                <a:spcPts val="0"/>
+              </a:spcBef>
+              <a:spcAft>
+                <a:spcPts val="0"/>
+              </a:spcAft>
+              <a:buNone/>
+            </a:pPr>
+            <a:r>
+              <a:rPr lang="en-US" sz="1800" b="1" i="0" u="none" strike="noStrike" cap="none" dirty="0">
+                <a:solidFill>
+                  <a:schemeClr val="tx1"/>
+                </a:solidFill>
+                <a:latin typeface="+mn-lt"/>
+                <a:ea typeface="Merriweather"/>
+                <a:cs typeface="Merriweather"/>
+                <a:sym typeface="Merriweather"/>
+              </a:rPr>
+              <a:t>TNM Staging</a:t>
+            </a:r>
+            <a:endParaRPr dirty="0">
+              <a:solidFill>
+                <a:schemeClr val="tx1"/>
+              </a:solidFill>
+              <a:latin typeface="+mn-lt"/>
+            </a:endParaRPr>
+          </a:p>
+        </p:txBody>
+      </p:sp>
+      <p:sp>
+        <p:nvSpPr>
+          <p:cNvPr id="5" name="Google Shape;262;p24">
+            <a:extLst>
+              <a:ext uri="{FF2B5EF4-FFF2-40B4-BE49-F238E27FC236}">
+                <a16:creationId xmlns:a16="http://schemas.microsoft.com/office/drawing/2014/main" id="{A35AE16C-F967-78F4-7A32-F5B5918A43C1}"/>
+              </a:ext>
+            </a:extLst>
+          </p:cNvPr>
+          <p:cNvSpPr txBox="1"/>
+          <p:nvPr/>
+        </p:nvSpPr>
+        <p:spPr>
+          <a:xfrm>
+            <a:off x="1395864" y="3314839"/>
+            <a:ext cx="2092057" cy="1477328"/>
+          </a:xfrm>
+          <a:prstGeom prst="rect">
+            <a:avLst/>
+          </a:prstGeom>
+          <a:noFill/>
+          <a:ln>
+            <a:noFill/>
+          </a:ln>
+        </p:spPr>
+        <p:txBody>
+          <a:bodyPr spcFirstLastPara="1" wrap="square" lIns="0" tIns="0" rIns="0" bIns="0" anchor="t" anchorCtr="0">
+            <a:spAutoFit/>
+          </a:bodyPr>
+          <a:lstStyle/>
+          <a:p>
+            <a:pPr marL="285750" marR="0" lvl="0" indent="-285750" rtl="0">
+              <a:lnSpc>
+                <a:spcPct val="200000"/>
+              </a:lnSpc>
+              <a:spcBef>
+                <a:spcPts val="0"/>
+              </a:spcBef>
+              <a:spcAft>
+                <a:spcPts val="0"/>
+              </a:spcAft>
+              <a:buFont typeface="Wingdings" pitchFamily="2" charset="2"/>
+              <a:buChar char="§"/>
+            </a:pPr>
+            <a:r>
+              <a:rPr lang="en-US" sz="1600" b="1" i="0" u="none" strike="noStrike" cap="none" dirty="0">
+                <a:solidFill>
+                  <a:schemeClr val="tx1"/>
+                </a:solidFill>
+                <a:latin typeface="+mn-lt"/>
+                <a:ea typeface="DM Sans"/>
+                <a:cs typeface="DM Sans"/>
+                <a:sym typeface="DM Sans"/>
+              </a:rPr>
+              <a:t>T</a:t>
+            </a:r>
+            <a:r>
+              <a:rPr lang="en-US" sz="1600" b="0" i="0" u="none" strike="noStrike" cap="none" dirty="0">
+                <a:solidFill>
+                  <a:schemeClr val="tx1"/>
+                </a:solidFill>
+                <a:latin typeface="+mn-lt"/>
+                <a:ea typeface="DM Sans"/>
+                <a:cs typeface="DM Sans"/>
+                <a:sym typeface="DM Sans"/>
+              </a:rPr>
+              <a:t>umor size</a:t>
+            </a:r>
+            <a:endParaRPr lang="en-US" sz="1600" dirty="0">
+              <a:solidFill>
+                <a:schemeClr val="tx1"/>
+              </a:solidFill>
+              <a:latin typeface="+mn-lt"/>
+              <a:ea typeface="DM Sans"/>
+              <a:cs typeface="DM Sans"/>
+              <a:sym typeface="DM Sans"/>
+            </a:endParaRPr>
+          </a:p>
+          <a:p>
+            <a:pPr marL="285750" marR="0" lvl="0" indent="-285750" rtl="0">
+              <a:lnSpc>
+                <a:spcPct val="200000"/>
+              </a:lnSpc>
+              <a:spcBef>
+                <a:spcPts val="0"/>
+              </a:spcBef>
+              <a:spcAft>
+                <a:spcPts val="0"/>
+              </a:spcAft>
+              <a:buFont typeface="Wingdings" pitchFamily="2" charset="2"/>
+              <a:buChar char="§"/>
+            </a:pPr>
+            <a:r>
+              <a:rPr lang="en-US" sz="1600" b="1" i="0" u="none" strike="noStrike" cap="none" dirty="0">
+                <a:solidFill>
+                  <a:schemeClr val="tx1"/>
+                </a:solidFill>
+                <a:latin typeface="+mn-lt"/>
+                <a:ea typeface="DM Sans"/>
+                <a:cs typeface="DM Sans"/>
+                <a:sym typeface="DM Sans"/>
+              </a:rPr>
+              <a:t>N</a:t>
+            </a:r>
+            <a:r>
+              <a:rPr lang="en-US" sz="1600" b="0" i="0" u="none" strike="noStrike" cap="none" dirty="0">
+                <a:solidFill>
+                  <a:schemeClr val="tx1"/>
+                </a:solidFill>
+                <a:latin typeface="+mn-lt"/>
+                <a:ea typeface="DM Sans"/>
+                <a:cs typeface="DM Sans"/>
+                <a:sym typeface="DM Sans"/>
+              </a:rPr>
+              <a:t>odes involved</a:t>
+            </a:r>
+            <a:endParaRPr lang="en-US" sz="1600" dirty="0">
+              <a:solidFill>
+                <a:schemeClr val="tx1"/>
+              </a:solidFill>
+              <a:latin typeface="+mn-lt"/>
+              <a:ea typeface="DM Sans"/>
+              <a:cs typeface="DM Sans"/>
+              <a:sym typeface="DM Sans"/>
+            </a:endParaRPr>
+          </a:p>
+          <a:p>
+            <a:pPr marL="285750" marR="0" lvl="0" indent="-285750" rtl="0">
+              <a:lnSpc>
+                <a:spcPct val="200000"/>
+              </a:lnSpc>
+              <a:spcBef>
+                <a:spcPts val="0"/>
+              </a:spcBef>
+              <a:spcAft>
+                <a:spcPts val="0"/>
+              </a:spcAft>
+              <a:buFont typeface="Wingdings" pitchFamily="2" charset="2"/>
+              <a:buChar char="§"/>
+            </a:pPr>
+            <a:r>
+              <a:rPr lang="en-US" sz="1600" b="1" i="0" u="none" strike="noStrike" cap="none" dirty="0">
+                <a:solidFill>
+                  <a:schemeClr val="tx1"/>
+                </a:solidFill>
+                <a:latin typeface="+mn-lt"/>
+                <a:ea typeface="DM Sans"/>
+                <a:cs typeface="DM Sans"/>
+                <a:sym typeface="DM Sans"/>
+              </a:rPr>
+              <a:t>M</a:t>
+            </a:r>
+            <a:r>
+              <a:rPr lang="en-US" sz="1600" b="0" i="0" u="none" strike="noStrike" cap="none" dirty="0">
+                <a:solidFill>
+                  <a:schemeClr val="tx1"/>
+                </a:solidFill>
+                <a:latin typeface="+mn-lt"/>
+                <a:ea typeface="DM Sans"/>
+                <a:cs typeface="DM Sans"/>
+                <a:sym typeface="DM Sans"/>
+              </a:rPr>
+              <a:t>etastasis. </a:t>
+            </a:r>
+            <a:endParaRPr sz="1600" dirty="0">
+              <a:solidFill>
+                <a:schemeClr val="tx1"/>
+              </a:solidFill>
+              <a:latin typeface="+mn-lt"/>
+            </a:endParaRPr>
+          </a:p>
+        </p:txBody>
+      </p:sp>
+      <p:pic>
+        <p:nvPicPr>
+          <p:cNvPr id="6" name="Google Shape;267;p24" descr="image.png">
+            <a:extLst>
+              <a:ext uri="{FF2B5EF4-FFF2-40B4-BE49-F238E27FC236}">
+                <a16:creationId xmlns:a16="http://schemas.microsoft.com/office/drawing/2014/main" id="{5D504EDC-4AB8-A800-1228-77F0BB879FC7}"/>
+              </a:ext>
+            </a:extLst>
+          </p:cNvPr>
+          <p:cNvPicPr preferRelativeResize="0"/>
+          <p:nvPr/>
+        </p:nvPicPr>
+        <p:blipFill rotWithShape="1">
+          <a:blip r:embed="rId6">
+            <a:alphaModFix/>
+          </a:blip>
+          <a:srcRect/>
+          <a:stretch/>
+        </p:blipFill>
+        <p:spPr>
+          <a:xfrm>
+            <a:off x="1395864" y="2290568"/>
+            <a:ext cx="804303" cy="578198"/>
+          </a:xfrm>
+          <a:prstGeom prst="rect">
+            <a:avLst/>
+          </a:prstGeom>
+          <a:noFill/>
+          <a:ln>
+            <a:noFill/>
+          </a:ln>
+        </p:spPr>
+      </p:pic>
+      <p:pic>
+        <p:nvPicPr>
+          <p:cNvPr id="10" name="Google Shape;259;p24" descr="image.png">
+            <a:extLst>
+              <a:ext uri="{FF2B5EF4-FFF2-40B4-BE49-F238E27FC236}">
+                <a16:creationId xmlns:a16="http://schemas.microsoft.com/office/drawing/2014/main" id="{DB3B5506-6BF2-3D32-9269-26B14EE35C6D}"/>
+              </a:ext>
+            </a:extLst>
+          </p:cNvPr>
+          <p:cNvPicPr preferRelativeResize="0"/>
+          <p:nvPr/>
+        </p:nvPicPr>
+        <p:blipFill rotWithShape="1">
+          <a:blip r:embed="rId4">
+            <a:alphaModFix/>
+          </a:blip>
+          <a:srcRect/>
+          <a:stretch/>
+        </p:blipFill>
+        <p:spPr>
+          <a:xfrm>
+            <a:off x="7816635" y="2182652"/>
+            <a:ext cx="2679192" cy="2697480"/>
+          </a:xfrm>
+          <a:prstGeom prst="rect">
+            <a:avLst/>
+          </a:prstGeom>
+          <a:noFill/>
+          <a:ln>
+            <a:noFill/>
+          </a:ln>
+        </p:spPr>
+      </p:pic>
+      <p:sp>
+        <p:nvSpPr>
+          <p:cNvPr id="11" name="Google Shape;265;p24">
+            <a:extLst>
+              <a:ext uri="{FF2B5EF4-FFF2-40B4-BE49-F238E27FC236}">
+                <a16:creationId xmlns:a16="http://schemas.microsoft.com/office/drawing/2014/main" id="{48AE9CE9-016B-DEFF-1E56-5C9EAD8B36E7}"/>
+              </a:ext>
+            </a:extLst>
+          </p:cNvPr>
+          <p:cNvSpPr txBox="1"/>
+          <p:nvPr/>
+        </p:nvSpPr>
+        <p:spPr>
+          <a:xfrm>
+            <a:off x="7827894" y="2939509"/>
+            <a:ext cx="1621807" cy="276999"/>
+          </a:xfrm>
+          <a:prstGeom prst="rect">
+            <a:avLst/>
+          </a:prstGeom>
+          <a:noFill/>
+          <a:ln>
+            <a:noFill/>
+          </a:ln>
+        </p:spPr>
+        <p:txBody>
+          <a:bodyPr spcFirstLastPara="1" wrap="square" lIns="0" tIns="0" rIns="0" bIns="0" anchor="t" anchorCtr="0">
+            <a:spAutoFit/>
+          </a:bodyPr>
+          <a:lstStyle/>
+          <a:p>
+            <a:pPr marL="0" marR="0" lvl="0" indent="0" algn="ctr" rtl="0">
+              <a:spcBef>
+                <a:spcPts val="0"/>
+              </a:spcBef>
+              <a:spcAft>
+                <a:spcPts val="0"/>
+              </a:spcAft>
+              <a:buNone/>
+            </a:pPr>
+            <a:r>
+              <a:rPr lang="en-US" sz="1800" b="1" i="0" u="none" strike="noStrike" cap="none" dirty="0">
+                <a:solidFill>
+                  <a:schemeClr val="tx1"/>
+                </a:solidFill>
+                <a:latin typeface="+mn-lt"/>
+                <a:ea typeface="Merriweather"/>
+                <a:cs typeface="Merriweather"/>
+                <a:sym typeface="Merriweather"/>
+              </a:rPr>
+              <a:t>Date Rules</a:t>
+            </a:r>
+            <a:endParaRPr dirty="0">
+              <a:solidFill>
+                <a:schemeClr val="tx1"/>
+              </a:solidFill>
+              <a:latin typeface="+mn-lt"/>
+            </a:endParaRPr>
+          </a:p>
+        </p:txBody>
+      </p:sp>
+      <p:sp>
+        <p:nvSpPr>
+          <p:cNvPr id="12" name="Google Shape;266;p24">
+            <a:extLst>
+              <a:ext uri="{FF2B5EF4-FFF2-40B4-BE49-F238E27FC236}">
+                <a16:creationId xmlns:a16="http://schemas.microsoft.com/office/drawing/2014/main" id="{7BCA4B48-CF83-31BF-4B30-C4E2D5DA6013}"/>
+              </a:ext>
+            </a:extLst>
+          </p:cNvPr>
+          <p:cNvSpPr txBox="1"/>
+          <p:nvPr/>
+        </p:nvSpPr>
+        <p:spPr>
+          <a:xfrm>
+            <a:off x="8090239" y="3234701"/>
+            <a:ext cx="2405588" cy="1477328"/>
+          </a:xfrm>
+          <a:prstGeom prst="rect">
+            <a:avLst/>
+          </a:prstGeom>
+          <a:noFill/>
+          <a:ln>
+            <a:noFill/>
+          </a:ln>
+        </p:spPr>
+        <p:txBody>
+          <a:bodyPr spcFirstLastPara="1" wrap="square" lIns="0" tIns="0" rIns="0" bIns="0" anchor="t" anchorCtr="0">
+            <a:spAutoFit/>
+          </a:bodyPr>
+          <a:lstStyle/>
+          <a:p>
+            <a:pPr marL="0" marR="0" lvl="0" indent="0" rtl="0">
+              <a:lnSpc>
+                <a:spcPct val="150000"/>
+              </a:lnSpc>
+              <a:spcBef>
+                <a:spcPts val="0"/>
+              </a:spcBef>
+              <a:spcAft>
+                <a:spcPts val="0"/>
+              </a:spcAft>
+              <a:buNone/>
+            </a:pPr>
+            <a:r>
+              <a:rPr lang="en-US" sz="1600" b="0" i="0" u="none" strike="noStrike" cap="none" dirty="0">
+                <a:solidFill>
+                  <a:schemeClr val="tx1"/>
+                </a:solidFill>
+                <a:latin typeface="+mn-lt"/>
+                <a:ea typeface="DM Sans"/>
+                <a:cs typeface="DM Sans"/>
+                <a:sym typeface="DM Sans"/>
+              </a:rPr>
+              <a:t>Anchor to the first definitive diagnosis (usually the pathology report date).</a:t>
+            </a:r>
+            <a:endParaRPr sz="1600" dirty="0">
+              <a:solidFill>
+                <a:schemeClr val="tx1"/>
+              </a:solidFill>
+              <a:latin typeface="+mn-lt"/>
+            </a:endParaRPr>
+          </a:p>
+        </p:txBody>
+      </p:sp>
+      <p:pic>
+        <p:nvPicPr>
+          <p:cNvPr id="13" name="Google Shape;269;p24" descr="image.png">
+            <a:extLst>
+              <a:ext uri="{FF2B5EF4-FFF2-40B4-BE49-F238E27FC236}">
+                <a16:creationId xmlns:a16="http://schemas.microsoft.com/office/drawing/2014/main" id="{8DA19663-403A-3594-9F79-B86BE2E16152}"/>
+              </a:ext>
+            </a:extLst>
+          </p:cNvPr>
+          <p:cNvPicPr preferRelativeResize="0"/>
+          <p:nvPr/>
+        </p:nvPicPr>
+        <p:blipFill rotWithShape="1">
+          <a:blip r:embed="rId7">
+            <a:alphaModFix/>
+          </a:blip>
+          <a:srcRect/>
+          <a:stretch/>
+        </p:blipFill>
+        <p:spPr>
+          <a:xfrm>
+            <a:off x="8418650" y="2207139"/>
+            <a:ext cx="888819" cy="687735"/>
+          </a:xfrm>
+          <a:prstGeom prst="rect">
+            <a:avLst/>
+          </a:prstGeom>
+          <a:noFill/>
+          <a:ln>
+            <a:noFill/>
+          </a:ln>
+        </p:spPr>
+      </p:pic>
+      <p:sp>
+        <p:nvSpPr>
+          <p:cNvPr id="15" name="TextBox 14">
+            <a:extLst>
+              <a:ext uri="{FF2B5EF4-FFF2-40B4-BE49-F238E27FC236}">
+                <a16:creationId xmlns:a16="http://schemas.microsoft.com/office/drawing/2014/main" id="{C5736EE3-4A7A-2CE2-E9BA-CA4B424CCFF3}"/>
+              </a:ext>
+            </a:extLst>
+          </p:cNvPr>
+          <p:cNvSpPr txBox="1"/>
+          <p:nvPr/>
+        </p:nvSpPr>
+        <p:spPr>
+          <a:xfrm>
+            <a:off x="1087666" y="5336820"/>
+            <a:ext cx="2182470" cy="785343"/>
+          </a:xfrm>
+          <a:prstGeom prst="rect">
+            <a:avLst/>
+          </a:prstGeom>
+          <a:noFill/>
+        </p:spPr>
+        <p:txBody>
+          <a:bodyPr wrap="square">
+            <a:spAutoFit/>
+          </a:bodyPr>
+          <a:lstStyle/>
+          <a:p>
+            <a:pPr>
+              <a:lnSpc>
+                <a:spcPct val="150000"/>
+              </a:lnSpc>
+            </a:pPr>
+            <a:r>
+              <a:rPr lang="en-US" sz="1600" b="1" i="0" u="none" strike="noStrike" cap="none" dirty="0">
+                <a:solidFill>
+                  <a:schemeClr val="tx1"/>
+                </a:solidFill>
+                <a:latin typeface="+mn-lt"/>
+                <a:ea typeface="DM Sans"/>
+                <a:cs typeface="DM Sans"/>
+                <a:sym typeface="DM Sans"/>
+              </a:rPr>
+              <a:t>Used for clinical treatment planning</a:t>
+            </a:r>
+            <a:endParaRPr lang="en-US" sz="1600" b="1" dirty="0"/>
+          </a:p>
+        </p:txBody>
+      </p:sp>
+      <p:sp>
+        <p:nvSpPr>
+          <p:cNvPr id="17" name="TextBox 16">
+            <a:extLst>
+              <a:ext uri="{FF2B5EF4-FFF2-40B4-BE49-F238E27FC236}">
+                <a16:creationId xmlns:a16="http://schemas.microsoft.com/office/drawing/2014/main" id="{824D03D3-290D-0047-5E2E-C0FF1F23EA77}"/>
+              </a:ext>
+            </a:extLst>
+          </p:cNvPr>
+          <p:cNvSpPr txBox="1"/>
+          <p:nvPr/>
+        </p:nvSpPr>
+        <p:spPr>
+          <a:xfrm>
+            <a:off x="4444442" y="5423446"/>
+            <a:ext cx="2849494" cy="698717"/>
+          </a:xfrm>
+          <a:prstGeom prst="rect">
+            <a:avLst/>
+          </a:prstGeom>
+          <a:noFill/>
+        </p:spPr>
+        <p:txBody>
+          <a:bodyPr wrap="square">
+            <a:spAutoFit/>
+          </a:bodyPr>
+          <a:lstStyle/>
+          <a:p>
+            <a:pPr>
+              <a:lnSpc>
+                <a:spcPct val="150000"/>
+              </a:lnSpc>
+            </a:pPr>
+            <a:r>
+              <a:rPr lang="en-US" sz="1400" b="1" i="0" u="none" strike="noStrike" cap="none" dirty="0">
+                <a:solidFill>
+                  <a:schemeClr val="tx1"/>
+                </a:solidFill>
+                <a:latin typeface="+mn-lt"/>
+                <a:ea typeface="DM Sans"/>
+                <a:cs typeface="DM Sans"/>
+                <a:sym typeface="DM Sans"/>
+              </a:rPr>
+              <a:t>Used for population-level comparison and Epidemiology</a:t>
+            </a:r>
+            <a:endParaRPr lang="en-US" b="1" dirty="0">
+              <a:solidFill>
+                <a:schemeClr val="tx1"/>
+              </a:solidFill>
+            </a:endParaRPr>
+          </a:p>
+        </p:txBody>
+      </p:sp>
+      <p:sp>
+        <p:nvSpPr>
+          <p:cNvPr id="18" name="Google Shape;264;p24">
+            <a:extLst>
+              <a:ext uri="{FF2B5EF4-FFF2-40B4-BE49-F238E27FC236}">
+                <a16:creationId xmlns:a16="http://schemas.microsoft.com/office/drawing/2014/main" id="{093057CE-1423-1B96-7879-5171B811FBB3}"/>
+              </a:ext>
+            </a:extLst>
+          </p:cNvPr>
+          <p:cNvSpPr txBox="1"/>
+          <p:nvPr/>
+        </p:nvSpPr>
+        <p:spPr>
+          <a:xfrm>
+            <a:off x="4902095" y="3321355"/>
+            <a:ext cx="1691456" cy="1477328"/>
+          </a:xfrm>
+          <a:prstGeom prst="rect">
+            <a:avLst/>
+          </a:prstGeom>
+          <a:noFill/>
+          <a:ln>
+            <a:noFill/>
+          </a:ln>
+        </p:spPr>
+        <p:txBody>
+          <a:bodyPr spcFirstLastPara="1" wrap="square" lIns="0" tIns="0" rIns="0" bIns="0" anchor="t" anchorCtr="0">
+            <a:spAutoFit/>
+          </a:bodyPr>
+          <a:lstStyle/>
+          <a:p>
+            <a:pPr marL="285750" marR="0" lvl="0" indent="-285750" rtl="0">
+              <a:lnSpc>
+                <a:spcPct val="200000"/>
+              </a:lnSpc>
+              <a:spcBef>
+                <a:spcPts val="0"/>
+              </a:spcBef>
+              <a:spcAft>
+                <a:spcPts val="0"/>
+              </a:spcAft>
+              <a:buFont typeface="Wingdings" pitchFamily="2" charset="2"/>
+              <a:buChar char="§"/>
+            </a:pPr>
+            <a:r>
+              <a:rPr lang="en-US" sz="1600" b="0" i="0" u="none" strike="noStrike" cap="none" dirty="0">
+                <a:solidFill>
+                  <a:schemeClr val="tx1"/>
+                </a:solidFill>
+                <a:latin typeface="+mn-lt"/>
+                <a:ea typeface="DM Sans"/>
+                <a:cs typeface="DM Sans"/>
+                <a:sym typeface="DM Sans"/>
+              </a:rPr>
+              <a:t>Localized</a:t>
+            </a:r>
+            <a:endParaRPr lang="en-US" sz="1600" dirty="0">
+              <a:solidFill>
+                <a:schemeClr val="tx1"/>
+              </a:solidFill>
+              <a:latin typeface="+mn-lt"/>
+              <a:ea typeface="DM Sans"/>
+              <a:cs typeface="DM Sans"/>
+              <a:sym typeface="DM Sans"/>
+            </a:endParaRPr>
+          </a:p>
+          <a:p>
+            <a:pPr marL="285750" marR="0" lvl="0" indent="-285750" rtl="0">
+              <a:lnSpc>
+                <a:spcPct val="200000"/>
+              </a:lnSpc>
+              <a:spcBef>
+                <a:spcPts val="0"/>
+              </a:spcBef>
+              <a:spcAft>
+                <a:spcPts val="0"/>
+              </a:spcAft>
+              <a:buFont typeface="Wingdings" pitchFamily="2" charset="2"/>
+              <a:buChar char="§"/>
+            </a:pPr>
+            <a:r>
+              <a:rPr lang="en-US" sz="1600" b="0" i="0" u="none" strike="noStrike" cap="none" dirty="0">
+                <a:solidFill>
+                  <a:schemeClr val="tx1"/>
+                </a:solidFill>
+                <a:latin typeface="+mn-lt"/>
+                <a:ea typeface="DM Sans"/>
+                <a:cs typeface="DM Sans"/>
+                <a:sym typeface="DM Sans"/>
+              </a:rPr>
+              <a:t>Regional</a:t>
+            </a:r>
+          </a:p>
+          <a:p>
+            <a:pPr marL="285750" marR="0" lvl="0" indent="-285750" rtl="0">
+              <a:lnSpc>
+                <a:spcPct val="200000"/>
+              </a:lnSpc>
+              <a:spcBef>
+                <a:spcPts val="0"/>
+              </a:spcBef>
+              <a:spcAft>
+                <a:spcPts val="0"/>
+              </a:spcAft>
+              <a:buFont typeface="Wingdings" pitchFamily="2" charset="2"/>
+              <a:buChar char="§"/>
+            </a:pPr>
+            <a:r>
+              <a:rPr lang="en-US" sz="1600" b="0" i="0" u="none" strike="noStrike" cap="none" dirty="0">
+                <a:solidFill>
+                  <a:schemeClr val="tx1"/>
+                </a:solidFill>
+                <a:latin typeface="+mn-lt"/>
+                <a:ea typeface="DM Sans"/>
+                <a:cs typeface="DM Sans"/>
+                <a:sym typeface="DM Sans"/>
+              </a:rPr>
+              <a:t>Distant. </a:t>
+            </a:r>
+            <a:endParaRPr sz="1600" dirty="0">
+              <a:solidFill>
+                <a:schemeClr val="tx1"/>
+              </a:solidFill>
+              <a:latin typeface="+mn-lt"/>
+            </a:endParaRPr>
+          </a:p>
+        </p:txBody>
+      </p:sp>
+      <p:sp>
+        <p:nvSpPr>
+          <p:cNvPr id="19" name="Right Arrow 18">
+            <a:extLst>
+              <a:ext uri="{FF2B5EF4-FFF2-40B4-BE49-F238E27FC236}">
+                <a16:creationId xmlns:a16="http://schemas.microsoft.com/office/drawing/2014/main" id="{5204407D-524F-9EB4-40D9-12E92B1E8BCA}"/>
+              </a:ext>
+            </a:extLst>
+          </p:cNvPr>
+          <p:cNvSpPr/>
+          <p:nvPr/>
+        </p:nvSpPr>
+        <p:spPr>
+          <a:xfrm rot="5400000">
+            <a:off x="1869364" y="4961194"/>
+            <a:ext cx="529705" cy="360375"/>
+          </a:xfrm>
+          <a:prstGeom prst="rightArrow">
+            <a:avLst/>
+          </a:prstGeom>
+          <a:solidFill>
+            <a:schemeClr val="tx1"/>
+          </a:solidFill>
+          <a:ln>
+            <a:solidFill>
+              <a:schemeClr val="tx1"/>
+            </a:solidFill>
+          </a:ln>
+        </p:spPr>
+        <p:style>
+          <a:lnRef idx="2">
+            <a:schemeClr val="accent1">
+              <a:shade val="15000"/>
+            </a:schemeClr>
+          </a:lnRef>
+          <a:fillRef idx="1">
+            <a:schemeClr val="accent1"/>
+          </a:fillRef>
+          <a:effectRef idx="0">
+            <a:schemeClr val="accent1"/>
+          </a:effectRef>
+          <a:fontRef idx="minor">
+            <a:schemeClr val="lt1"/>
+          </a:fontRef>
+        </p:style>
+        <p:txBody>
+          <a:bodyPr rtlCol="0" anchor="ctr"/>
+          <a:lstStyle/>
+          <a:p>
+            <a:pPr algn="ctr"/>
+            <a:endParaRPr lang="en-US">
+              <a:solidFill>
+                <a:srgbClr val="757575"/>
+              </a:solidFill>
+            </a:endParaRPr>
+          </a:p>
+        </p:txBody>
+      </p:sp>
+      <p:sp>
+        <p:nvSpPr>
+          <p:cNvPr id="20" name="Right Arrow 19">
+            <a:extLst>
+              <a:ext uri="{FF2B5EF4-FFF2-40B4-BE49-F238E27FC236}">
+                <a16:creationId xmlns:a16="http://schemas.microsoft.com/office/drawing/2014/main" id="{A5B51BA6-D0A2-5E77-84CA-297B5E6A587F}"/>
+              </a:ext>
+            </a:extLst>
+          </p:cNvPr>
+          <p:cNvSpPr/>
+          <p:nvPr/>
+        </p:nvSpPr>
+        <p:spPr>
+          <a:xfrm rot="5400000">
+            <a:off x="5341820" y="4961193"/>
+            <a:ext cx="529705" cy="360375"/>
+          </a:xfrm>
+          <a:prstGeom prst="rightArrow">
+            <a:avLst/>
+          </a:prstGeom>
+          <a:solidFill>
+            <a:schemeClr val="tx1"/>
+          </a:solidFill>
+          <a:ln>
+            <a:solidFill>
+              <a:schemeClr val="tx1"/>
+            </a:solidFill>
+          </a:ln>
+        </p:spPr>
+        <p:style>
+          <a:lnRef idx="2">
+            <a:schemeClr val="accent1">
+              <a:shade val="15000"/>
+            </a:schemeClr>
+          </a:lnRef>
+          <a:fillRef idx="1">
+            <a:schemeClr val="accent1"/>
+          </a:fillRef>
+          <a:effectRef idx="0">
+            <a:schemeClr val="accent1"/>
+          </a:effectRef>
+          <a:fontRef idx="minor">
+            <a:schemeClr val="lt1"/>
+          </a:fontRef>
+        </p:style>
+        <p:txBody>
+          <a:bodyPr rtlCol="0" anchor="ctr"/>
+          <a:lstStyle/>
+          <a:p>
+            <a:pPr algn="ctr"/>
+            <a:endParaRPr lang="en-US">
+              <a:solidFill>
+                <a:srgbClr val="757575"/>
+              </a:solidFill>
+            </a:endParaRPr>
+          </a:p>
+        </p:txBody>
+      </p:sp>
+    </p:spTree>
+  </p:cSld>
+  <p:clrMapOvr>
+    <a:masterClrMapping/>
+  </p:clrMapOvr>
+</p:sld>
+</file>
+
+<file path=ppt/slides/slide9.xml><?xml version="1.0" encoding="utf-8"?>
+<p:sld xmlns:a="http://schemas.openxmlformats.org/drawingml/2006/main" xmlns:r="http://schemas.openxmlformats.org/officeDocument/2006/relationships" xmlns:p="http://schemas.openxmlformats.org/presentationml/2006/main">
+  <p:cSld>
+    <p:bg>
+      <p:bgPr>
+        <a:solidFill>
+          <a:srgbClr val="FFFFFF"/>
+        </a:solidFill>
+        <a:effectLst/>
+      </p:bgPr>
+    </p:bg>
+    <p:spTree>
+      <p:nvGrpSpPr>
+        <p:cNvPr id="1" name="Shape 275"/>
+        <p:cNvGrpSpPr/>
+        <p:nvPr/>
+      </p:nvGrpSpPr>
+      <p:grpSpPr>
+        <a:xfrm>
+          <a:off x="0" y="0"/>
+          <a:ext cx="0" cy="0"/>
+          <a:chOff x="0" y="0"/>
+          <a:chExt cx="0" cy="0"/>
+        </a:xfrm>
+      </p:grpSpPr>
+      <p:pic>
+        <p:nvPicPr>
+          <p:cNvPr id="276" name="Google Shape;276;p25" descr="image.png"/>
+          <p:cNvPicPr preferRelativeResize="0"/>
+          <p:nvPr/>
+        </p:nvPicPr>
+        <p:blipFill rotWithShape="1">
+          <a:blip r:embed="rId3">
+            <a:alphaModFix/>
+          </a:blip>
+          <a:srcRect/>
+          <a:stretch/>
+        </p:blipFill>
+        <p:spPr>
+          <a:xfrm>
+            <a:off x="0" y="0"/>
+            <a:ext cx="12192000" cy="6858000"/>
+          </a:xfrm>
+          <a:prstGeom prst="rect">
+            <a:avLst/>
+          </a:prstGeom>
+          <a:noFill/>
+          <a:ln>
+            <a:noFill/>
+          </a:ln>
+        </p:spPr>
+      </p:pic>
+      <p:sp>
+        <p:nvSpPr>
+          <p:cNvPr id="277" name="Google Shape;277;p25"/>
+          <p:cNvSpPr txBox="1"/>
+          <p:nvPr/>
+        </p:nvSpPr>
+        <p:spPr>
+          <a:xfrm>
+            <a:off x="342900" y="91585"/>
+            <a:ext cx="4800600" cy="553998"/>
+          </a:xfrm>
+          <a:prstGeom prst="rect">
+            <a:avLst/>
+          </a:prstGeom>
+          <a:noFill/>
+          <a:ln>
+            <a:noFill/>
+          </a:ln>
+        </p:spPr>
+        <p:txBody>
+          <a:bodyPr spcFirstLastPara="1" wrap="square" lIns="0" tIns="0" rIns="0" bIns="0" anchor="t" anchorCtr="0">
+            <a:spAutoFit/>
+          </a:bodyPr>
+          <a:lstStyle/>
+          <a:p>
+            <a:pPr marL="0" marR="0" lvl="0" indent="0" algn="l" rtl="0">
+              <a:spcBef>
+                <a:spcPts val="0"/>
+              </a:spcBef>
+              <a:spcAft>
+                <a:spcPts val="0"/>
+              </a:spcAft>
+              <a:buNone/>
+            </a:pPr>
+            <a:r>
+              <a:rPr lang="en-US" sz="3600" b="1" i="0" u="none" strike="noStrike" cap="none" dirty="0">
+                <a:solidFill>
+                  <a:schemeClr val="bg2">
+                    <a:lumMod val="60000"/>
+                    <a:lumOff val="40000"/>
+                  </a:schemeClr>
+                </a:solidFill>
+                <a:latin typeface="+mn-lt"/>
+                <a:ea typeface="Merriweather"/>
+                <a:cs typeface="Merriweather"/>
+                <a:sym typeface="Merriweather"/>
+              </a:rPr>
+              <a:t>The Data Ecosystem</a:t>
+            </a:r>
+            <a:endParaRPr dirty="0">
+              <a:solidFill>
+                <a:schemeClr val="bg2">
+                  <a:lumMod val="60000"/>
+                  <a:lumOff val="40000"/>
+                </a:schemeClr>
+              </a:solidFill>
+              <a:latin typeface="+mn-lt"/>
+            </a:endParaRPr>
+          </a:p>
+        </p:txBody>
+      </p:sp>
+      <p:sp>
+        <p:nvSpPr>
+          <p:cNvPr id="280" name="Google Shape;280;p25"/>
+          <p:cNvSpPr txBox="1"/>
+          <p:nvPr/>
+        </p:nvSpPr>
+        <p:spPr>
+          <a:xfrm>
+            <a:off x="2617470" y="1291165"/>
+            <a:ext cx="7372350" cy="492443"/>
+          </a:xfrm>
+          <a:prstGeom prst="rect">
+            <a:avLst/>
+          </a:prstGeom>
+          <a:noFill/>
+          <a:ln>
+            <a:noFill/>
+          </a:ln>
+        </p:spPr>
+        <p:txBody>
+          <a:bodyPr spcFirstLastPara="1" wrap="square" lIns="0" tIns="0" rIns="0" bIns="0" anchor="t" anchorCtr="0">
+            <a:spAutoFit/>
+          </a:bodyPr>
+          <a:lstStyle/>
+          <a:p>
+            <a:pPr marL="0" marR="0" lvl="0" indent="0" algn="l" rtl="0">
+              <a:lnSpc>
+                <a:spcPct val="160000"/>
+              </a:lnSpc>
+              <a:spcBef>
+                <a:spcPts val="0"/>
+              </a:spcBef>
+              <a:spcAft>
+                <a:spcPts val="0"/>
+              </a:spcAft>
+              <a:buNone/>
+            </a:pPr>
+            <a:r>
+              <a:rPr lang="en-US" sz="2000" b="1" i="0" u="none" strike="noStrike" cap="none" dirty="0">
+                <a:solidFill>
+                  <a:srgbClr val="374151"/>
+                </a:solidFill>
+                <a:latin typeface="+mn-lt"/>
+                <a:ea typeface="DM Sans"/>
+                <a:cs typeface="DM Sans"/>
+                <a:sym typeface="DM Sans"/>
+              </a:rPr>
+              <a:t>Cancer data is an aggregation of multiple streams:</a:t>
+            </a:r>
+            <a:endParaRPr sz="2000" b="1" dirty="0">
+              <a:latin typeface="+mn-lt"/>
+            </a:endParaRPr>
+          </a:p>
+        </p:txBody>
+      </p:sp>
+      <p:pic>
+        <p:nvPicPr>
+          <p:cNvPr id="4" name="Picture 3">
+            <a:extLst>
+              <a:ext uri="{FF2B5EF4-FFF2-40B4-BE49-F238E27FC236}">
+                <a16:creationId xmlns:a16="http://schemas.microsoft.com/office/drawing/2014/main" id="{346DBA2C-84F2-762E-FE52-033123D39996}"/>
+              </a:ext>
+            </a:extLst>
+          </p:cNvPr>
+          <p:cNvPicPr>
+            <a:picLocks noChangeAspect="1"/>
+          </p:cNvPicPr>
+          <p:nvPr/>
+        </p:nvPicPr>
+        <p:blipFill>
+          <a:blip r:embed="rId4"/>
+          <a:stretch>
+            <a:fillRect/>
+          </a:stretch>
+        </p:blipFill>
+        <p:spPr>
+          <a:xfrm>
+            <a:off x="1212731" y="1936748"/>
+            <a:ext cx="9766537" cy="4443966"/>
+          </a:xfrm>
+          <a:prstGeom prst="rect">
+            <a:avLst/>
+          </a:prstGeom>
+        </p:spPr>
+      </p:pic>
     </p:spTree>
   </p:cSld>
   <p:clrMapOvr>
